--- a/public/team_presentations/team_7_presentation.pptx
+++ b/public/team_presentations/team_7_presentation.pptx
@@ -9,15 +9,18 @@
     <p:sldId id="259" r:id="rId3"/>
     <p:sldId id="260" r:id="rId4"/>
     <p:sldId id="261" r:id="rId5"/>
-    <p:sldId id="258" r:id="rId6"/>
-    <p:sldId id="262" r:id="rId7"/>
-    <p:sldId id="263" r:id="rId8"/>
-    <p:sldId id="265" r:id="rId9"/>
-    <p:sldId id="266" r:id="rId10"/>
-    <p:sldId id="267" r:id="rId11"/>
-    <p:sldId id="264" r:id="rId12"/>
-    <p:sldId id="268" r:id="rId13"/>
-    <p:sldId id="269" r:id="rId14"/>
+    <p:sldId id="263" r:id="rId6"/>
+    <p:sldId id="271" r:id="rId7"/>
+    <p:sldId id="265" r:id="rId8"/>
+    <p:sldId id="275" r:id="rId9"/>
+    <p:sldId id="274" r:id="rId10"/>
+    <p:sldId id="266" r:id="rId11"/>
+    <p:sldId id="270" r:id="rId12"/>
+    <p:sldId id="264" r:id="rId13"/>
+    <p:sldId id="268" r:id="rId14"/>
+    <p:sldId id="272" r:id="rId15"/>
+    <p:sldId id="269" r:id="rId16"/>
+    <p:sldId id="276" r:id="rId17"/>
   </p:sldIdLst>
   <p:sldSz cx="12192000" cy="6858000"/>
   <p:notesSz cx="6858000" cy="9144000"/>
@@ -4393,7 +4396,7 @@
           <a:p>
             <a:fld id="{48A87A34-81AB-432B-8DAE-1953F412C126}" type="datetimeFigureOut">
               <a:rPr lang="en-US" dirty="0"/>
-              <a:t>5/5/2025</a:t>
+              <a:t>6/10/2025</a:t>
             </a:fld>
             <a:endParaRPr lang="en-US" dirty="0"/>
           </a:p>
@@ -4653,7 +4656,7 @@
           <a:p>
             <a:fld id="{48A87A34-81AB-432B-8DAE-1953F412C126}" type="datetimeFigureOut">
               <a:rPr lang="en-US" dirty="0"/>
-              <a:t>5/5/2025</a:t>
+              <a:t>6/10/2025</a:t>
             </a:fld>
             <a:endParaRPr lang="en-US" dirty="0"/>
           </a:p>
@@ -4843,7 +4846,7 @@
           <a:p>
             <a:fld id="{48A87A34-81AB-432B-8DAE-1953F412C126}" type="datetimeFigureOut">
               <a:rPr lang="en-US" dirty="0"/>
-              <a:t>5/5/2025</a:t>
+              <a:t>6/10/2025</a:t>
             </a:fld>
             <a:endParaRPr lang="en-US" dirty="0"/>
           </a:p>
@@ -5100,7 +5103,7 @@
           <a:p>
             <a:fld id="{48A87A34-81AB-432B-8DAE-1953F412C126}" type="datetimeFigureOut">
               <a:rPr lang="en-US" dirty="0"/>
-              <a:t>5/5/2025</a:t>
+              <a:t>6/10/2025</a:t>
             </a:fld>
             <a:endParaRPr lang="en-US" dirty="0"/>
           </a:p>
@@ -5528,7 +5531,7 @@
           <a:p>
             <a:fld id="{48A87A34-81AB-432B-8DAE-1953F412C126}" type="datetimeFigureOut">
               <a:rPr lang="en-US" dirty="0"/>
-              <a:t>5/5/2025</a:t>
+              <a:t>6/10/2025</a:t>
             </a:fld>
             <a:endParaRPr lang="en-US" dirty="0"/>
           </a:p>
@@ -6068,7 +6071,7 @@
           <a:p>
             <a:fld id="{48A87A34-81AB-432B-8DAE-1953F412C126}" type="datetimeFigureOut">
               <a:rPr lang="en-US" dirty="0"/>
-              <a:t>5/5/2025</a:t>
+              <a:t>6/10/2025</a:t>
             </a:fld>
             <a:endParaRPr lang="en-US" dirty="0"/>
           </a:p>
@@ -6779,7 +6782,7 @@
           <a:p>
             <a:fld id="{48A87A34-81AB-432B-8DAE-1953F412C126}" type="datetimeFigureOut">
               <a:rPr lang="en-US" dirty="0"/>
-              <a:t>5/5/2025</a:t>
+              <a:t>6/10/2025</a:t>
             </a:fld>
             <a:endParaRPr lang="en-US" dirty="0"/>
           </a:p>
@@ -6942,7 +6945,7 @@
           <a:p>
             <a:fld id="{48A87A34-81AB-432B-8DAE-1953F412C126}" type="datetimeFigureOut">
               <a:rPr lang="en-US" dirty="0"/>
-              <a:t>5/5/2025</a:t>
+              <a:t>6/10/2025</a:t>
             </a:fld>
             <a:endParaRPr lang="en-US" dirty="0"/>
           </a:p>
@@ -7115,7 +7118,7 @@
           <a:p>
             <a:fld id="{48A87A34-81AB-432B-8DAE-1953F412C126}" type="datetimeFigureOut">
               <a:rPr lang="en-US" dirty="0"/>
-              <a:t>5/5/2025</a:t>
+              <a:t>6/10/2025</a:t>
             </a:fld>
             <a:endParaRPr lang="en-US" dirty="0"/>
           </a:p>
@@ -7278,7 +7281,7 @@
           <a:p>
             <a:fld id="{48A87A34-81AB-432B-8DAE-1953F412C126}" type="datetimeFigureOut">
               <a:rPr lang="en-US" dirty="0"/>
-              <a:t>5/5/2025</a:t>
+              <a:t>6/10/2025</a:t>
             </a:fld>
             <a:endParaRPr lang="en-US" dirty="0"/>
           </a:p>
@@ -7522,7 +7525,7 @@
           <a:p>
             <a:fld id="{48A87A34-81AB-432B-8DAE-1953F412C126}" type="datetimeFigureOut">
               <a:rPr lang="en-US" dirty="0"/>
-              <a:t>5/5/2025</a:t>
+              <a:t>6/10/2025</a:t>
             </a:fld>
             <a:endParaRPr lang="en-US" dirty="0"/>
           </a:p>
@@ -7746,7 +7749,7 @@
           <a:p>
             <a:fld id="{48A87A34-81AB-432B-8DAE-1953F412C126}" type="datetimeFigureOut">
               <a:rPr lang="en-US" dirty="0"/>
-              <a:t>5/5/2025</a:t>
+              <a:t>6/10/2025</a:t>
             </a:fld>
             <a:endParaRPr lang="en-US" dirty="0"/>
           </a:p>
@@ -8119,7 +8122,7 @@
           <a:p>
             <a:fld id="{48A87A34-81AB-432B-8DAE-1953F412C126}" type="datetimeFigureOut">
               <a:rPr lang="en-US" dirty="0"/>
-              <a:t>5/5/2025</a:t>
+              <a:t>6/10/2025</a:t>
             </a:fld>
             <a:endParaRPr lang="en-US" dirty="0"/>
           </a:p>
@@ -8231,7 +8234,7 @@
           <a:p>
             <a:fld id="{48A87A34-81AB-432B-8DAE-1953F412C126}" type="datetimeFigureOut">
               <a:rPr lang="en-US" dirty="0"/>
-              <a:t>5/5/2025</a:t>
+              <a:t>6/10/2025</a:t>
             </a:fld>
             <a:endParaRPr lang="en-US" dirty="0"/>
           </a:p>
@@ -8321,7 +8324,7 @@
           <a:p>
             <a:fld id="{48A87A34-81AB-432B-8DAE-1953F412C126}" type="datetimeFigureOut">
               <a:rPr lang="en-US" dirty="0"/>
-              <a:t>5/5/2025</a:t>
+              <a:t>6/10/2025</a:t>
             </a:fld>
             <a:endParaRPr lang="en-US" dirty="0"/>
           </a:p>
@@ -8563,7 +8566,7 @@
           <a:p>
             <a:fld id="{48A87A34-81AB-432B-8DAE-1953F412C126}" type="datetimeFigureOut">
               <a:rPr lang="en-US" dirty="0"/>
-              <a:t>5/5/2025</a:t>
+              <a:t>6/10/2025</a:t>
             </a:fld>
             <a:endParaRPr lang="en-US" dirty="0"/>
           </a:p>
@@ -8836,7 +8839,7 @@
           <a:p>
             <a:fld id="{48A87A34-81AB-432B-8DAE-1953F412C126}" type="datetimeFigureOut">
               <a:rPr lang="en-US" dirty="0"/>
-              <a:t>5/5/2025</a:t>
+              <a:t>6/10/2025</a:t>
             </a:fld>
             <a:endParaRPr lang="en-US" dirty="0"/>
           </a:p>
@@ -11908,7 +11911,7 @@
             <a:fld id="{48A87A34-81AB-432B-8DAE-1953F412C126}" type="datetimeFigureOut">
               <a:rPr lang="en-US" dirty="0"/>
               <a:pPr/>
-              <a:t>5/5/2025</a:t>
+              <a:t>6/10/2025</a:t>
             </a:fld>
             <a:endParaRPr lang="en-US" dirty="0"/>
           </a:p>
@@ -12340,7 +12343,12 @@
             <p:ph type="ctrTitle"/>
           </p:nvPr>
         </p:nvSpPr>
-        <p:spPr/>
+        <p:spPr>
+          <a:xfrm>
+            <a:off x="2218252" y="-204762"/>
+            <a:ext cx="8791575" cy="2387600"/>
+          </a:xfrm>
+        </p:spPr>
         <p:txBody>
           <a:bodyPr/>
           <a:lstStyle/>
@@ -12370,7 +12378,7 @@
         </p:nvSpPr>
         <p:spPr>
           <a:xfrm>
-            <a:off x="2132394" y="3795928"/>
+            <a:off x="2218252" y="3062541"/>
             <a:ext cx="6571873" cy="2240966"/>
           </a:xfrm>
         </p:spPr>
@@ -12458,14 +12466,76 @@
         </p:blipFill>
         <p:spPr>
           <a:xfrm>
-            <a:off x="6507086" y="2831146"/>
+            <a:off x="6479645" y="2831146"/>
             <a:ext cx="5273828" cy="3758797"/>
           </a:xfrm>
           <a:prstGeom prst="rect">
             <a:avLst/>
           </a:prstGeom>
+          <a:solidFill>
+            <a:srgbClr val="FFFFFF">
+              <a:shade val="85000"/>
+            </a:srgbClr>
+          </a:solidFill>
+          <a:ln w="190500" cap="rnd">
+            <a:solidFill>
+              <a:srgbClr val="FFFFFF"/>
+            </a:solidFill>
+          </a:ln>
+          <a:effectLst>
+            <a:outerShdw blurRad="50000" algn="tl" rotWithShape="0">
+              <a:srgbClr val="000000">
+                <a:alpha val="41000"/>
+              </a:srgbClr>
+            </a:outerShdw>
+          </a:effectLst>
+          <a:scene3d>
+            <a:camera prst="orthographicFront"/>
+            <a:lightRig rig="twoPt" dir="t">
+              <a:rot lat="0" lon="0" rev="7800000"/>
+            </a:lightRig>
+          </a:scene3d>
+          <a:sp3d contourW="6350">
+            <a:bevelT w="50800" h="16510"/>
+            <a:contourClr>
+              <a:srgbClr val="C0C0C0"/>
+            </a:contourClr>
+          </a:sp3d>
         </p:spPr>
       </p:pic>
+      <p:sp>
+        <p:nvSpPr>
+          <p:cNvPr id="4" name="TextBox 3">
+            <a:extLst>
+              <a:ext uri="{FF2B5EF4-FFF2-40B4-BE49-F238E27FC236}">
+                <a16:creationId xmlns:a16="http://schemas.microsoft.com/office/drawing/2014/main" id="{C82B0F9B-AD70-EE53-E969-4EA740961CB9}"/>
+              </a:ext>
+            </a:extLst>
+          </p:cNvPr>
+          <p:cNvSpPr txBox="1"/>
+          <p:nvPr/>
+        </p:nvSpPr>
+        <p:spPr>
+          <a:xfrm>
+            <a:off x="5181600" y="2513094"/>
+            <a:ext cx="1828800" cy="1828800"/>
+          </a:xfrm>
+          <a:prstGeom prst="rect">
+            <a:avLst/>
+          </a:prstGeom>
+          <a:noFill/>
+        </p:spPr>
+        <p:txBody>
+          <a:bodyPr wrap="square" rtlCol="0">
+            <a:spAutoFit/>
+          </a:bodyPr>
+          <a:lstStyle/>
+          <a:p>
+            <a:pPr algn="l"/>
+            <a:endParaRPr lang="en-US" dirty="0"/>
+          </a:p>
+        </p:txBody>
+      </p:sp>
     </p:spTree>
     <p:extLst>
       <p:ext uri="{BB962C8B-B14F-4D97-AF65-F5344CB8AC3E}">
@@ -12501,7 +12571,7 @@
           <p:cNvPr id="2" name="Title 1">
             <a:extLst>
               <a:ext uri="{FF2B5EF4-FFF2-40B4-BE49-F238E27FC236}">
-                <a16:creationId xmlns:a16="http://schemas.microsoft.com/office/drawing/2014/main" id="{CA6BD10B-50DB-6436-BE5D-45182CD927BA}"/>
+                <a16:creationId xmlns:a16="http://schemas.microsoft.com/office/drawing/2014/main" id="{2B28BB1D-57F8-8547-2E42-D7B49CB89052}"/>
               </a:ext>
             </a:extLst>
           </p:cNvPr>
@@ -12514,7 +12584,7 @@
         </p:nvSpPr>
         <p:spPr>
           <a:xfrm>
-            <a:off x="1141414" y="0"/>
+            <a:off x="1143001" y="0"/>
             <a:ext cx="9905998" cy="1478570"/>
           </a:xfrm>
         </p:spPr>
@@ -12524,7 +12594,7 @@
           <a:p>
             <a:r>
               <a:rPr lang="en-US" dirty="0"/>
-              <a:t>Components used</a:t>
+              <a:t>Components SELECTION</a:t>
             </a:r>
           </a:p>
         </p:txBody>
@@ -12534,7 +12604,7 @@
           <p:cNvPr id="4" name="Content Placeholder 3">
             <a:extLst>
               <a:ext uri="{FF2B5EF4-FFF2-40B4-BE49-F238E27FC236}">
-                <a16:creationId xmlns:a16="http://schemas.microsoft.com/office/drawing/2014/main" id="{F396E26F-2CDF-5DE9-E870-6269D6B237E0}"/>
+                <a16:creationId xmlns:a16="http://schemas.microsoft.com/office/drawing/2014/main" id="{4709F9F1-ED81-50BF-02D4-69861AE7E49C}"/>
               </a:ext>
             </a:extLst>
           </p:cNvPr>
@@ -12553,17 +12623,17 @@
         </p:blipFill>
         <p:spPr>
           <a:xfrm>
-            <a:off x="1503497" y="5101728"/>
-            <a:ext cx="2845710" cy="1478570"/>
+            <a:off x="6356463" y="1591174"/>
+            <a:ext cx="4555824" cy="2009309"/>
           </a:xfrm>
         </p:spPr>
       </p:pic>
       <p:pic>
         <p:nvPicPr>
-          <p:cNvPr id="5" name="Picture 4">
+          <p:cNvPr id="6" name="Picture 5">
             <a:extLst>
               <a:ext uri="{FF2B5EF4-FFF2-40B4-BE49-F238E27FC236}">
-                <a16:creationId xmlns:a16="http://schemas.microsoft.com/office/drawing/2014/main" id="{A30E50B7-C30A-45BC-5C26-EBFA82302B9C}"/>
+                <a16:creationId xmlns:a16="http://schemas.microsoft.com/office/drawing/2014/main" id="{68D3FBDB-AC53-C4BA-5C4C-30FFDFE85943}"/>
               </a:ext>
             </a:extLst>
           </p:cNvPr>
@@ -12580,20 +12650,53 @@
         </p:blipFill>
         <p:spPr>
           <a:xfrm>
-            <a:off x="1490276" y="1578120"/>
-            <a:ext cx="2715809" cy="1382301"/>
+            <a:off x="1442998" y="4423038"/>
+            <a:ext cx="3072095" cy="2097087"/>
           </a:xfrm>
           <a:prstGeom prst="rect">
             <a:avLst/>
           </a:prstGeom>
         </p:spPr>
       </p:pic>
+      <p:sp>
+        <p:nvSpPr>
+          <p:cNvPr id="3" name="TextBox 2">
+            <a:extLst>
+              <a:ext uri="{FF2B5EF4-FFF2-40B4-BE49-F238E27FC236}">
+                <a16:creationId xmlns:a16="http://schemas.microsoft.com/office/drawing/2014/main" id="{06BCEF27-EAAF-B6A3-E700-4A3E27FD6F5D}"/>
+              </a:ext>
+            </a:extLst>
+          </p:cNvPr>
+          <p:cNvSpPr txBox="1"/>
+          <p:nvPr/>
+        </p:nvSpPr>
+        <p:spPr>
+          <a:xfrm rot="1175396">
+            <a:off x="5175576" y="2513094"/>
+            <a:ext cx="1828800" cy="1828800"/>
+          </a:xfrm>
+          <a:prstGeom prst="rect">
+            <a:avLst/>
+          </a:prstGeom>
+          <a:noFill/>
+        </p:spPr>
+        <p:txBody>
+          <a:bodyPr wrap="square" rtlCol="0">
+            <a:spAutoFit/>
+          </a:bodyPr>
+          <a:lstStyle/>
+          <a:p>
+            <a:pPr algn="l"/>
+            <a:endParaRPr lang="en-US"/>
+          </a:p>
+        </p:txBody>
+      </p:sp>
       <p:pic>
         <p:nvPicPr>
-          <p:cNvPr id="6" name="Picture 5">
+          <p:cNvPr id="5" name="Picture 4">
             <a:extLst>
               <a:ext uri="{FF2B5EF4-FFF2-40B4-BE49-F238E27FC236}">
-                <a16:creationId xmlns:a16="http://schemas.microsoft.com/office/drawing/2014/main" id="{C86B4A85-C61F-2F29-3F31-DD4B05E1920E}"/>
+                <a16:creationId xmlns:a16="http://schemas.microsoft.com/office/drawing/2014/main" id="{51D514F6-EDAD-DF06-C239-01E58A9236F4}"/>
               </a:ext>
             </a:extLst>
           </p:cNvPr>
@@ -12610,8 +12713,68 @@
         </p:blipFill>
         <p:spPr>
           <a:xfrm>
-            <a:off x="7486432" y="2960421"/>
-            <a:ext cx="2357851" cy="1468317"/>
+            <a:off x="1366866" y="1594001"/>
+            <a:ext cx="4241757" cy="2097088"/>
+          </a:xfrm>
+          <a:prstGeom prst="rect">
+            <a:avLst/>
+          </a:prstGeom>
+        </p:spPr>
+      </p:pic>
+      <p:pic>
+        <p:nvPicPr>
+          <p:cNvPr id="8" name="Picture 7">
+            <a:extLst>
+              <a:ext uri="{FF2B5EF4-FFF2-40B4-BE49-F238E27FC236}">
+                <a16:creationId xmlns:a16="http://schemas.microsoft.com/office/drawing/2014/main" id="{F12409FB-1569-67C8-2F68-5F40108CDE49}"/>
+              </a:ext>
+            </a:extLst>
+          </p:cNvPr>
+          <p:cNvPicPr>
+            <a:picLocks noChangeAspect="1"/>
+          </p:cNvPicPr>
+          <p:nvPr/>
+        </p:nvPicPr>
+        <p:blipFill>
+          <a:blip r:embed="rId5"/>
+          <a:stretch>
+            <a:fillRect/>
+          </a:stretch>
+        </p:blipFill>
+        <p:spPr>
+          <a:xfrm>
+            <a:off x="4921919" y="4708155"/>
+            <a:ext cx="2442590" cy="1405568"/>
+          </a:xfrm>
+          <a:prstGeom prst="rect">
+            <a:avLst/>
+          </a:prstGeom>
+        </p:spPr>
+      </p:pic>
+      <p:pic>
+        <p:nvPicPr>
+          <p:cNvPr id="9" name="Picture 8">
+            <a:extLst>
+              <a:ext uri="{FF2B5EF4-FFF2-40B4-BE49-F238E27FC236}">
+                <a16:creationId xmlns:a16="http://schemas.microsoft.com/office/drawing/2014/main" id="{7E997A0B-9B90-E1CF-04A1-37E7F2CEBFC0}"/>
+              </a:ext>
+            </a:extLst>
+          </p:cNvPr>
+          <p:cNvPicPr>
+            <a:picLocks noChangeAspect="1"/>
+          </p:cNvPicPr>
+          <p:nvPr/>
+        </p:nvPicPr>
+        <p:blipFill>
+          <a:blip r:embed="rId6"/>
+          <a:stretch>
+            <a:fillRect/>
+          </a:stretch>
+        </p:blipFill>
+        <p:spPr>
+          <a:xfrm>
+            <a:off x="7771335" y="4483976"/>
+            <a:ext cx="3112133" cy="1975209"/>
           </a:xfrm>
           <a:prstGeom prst="rect">
             <a:avLst/>
@@ -12621,7 +12784,7 @@
     </p:spTree>
     <p:extLst>
       <p:ext uri="{BB962C8B-B14F-4D97-AF65-F5344CB8AC3E}">
-        <p14:creationId xmlns:p14="http://schemas.microsoft.com/office/powerpoint/2010/main" val="3899396396"/>
+        <p14:creationId xmlns:p14="http://schemas.microsoft.com/office/powerpoint/2010/main" val="136746177"/>
       </p:ext>
     </p:extLst>
   </p:cSld>
@@ -12632,6 +12795,98 @@
 </file>
 
 <file path=ppt/slides/slide11.xml><?xml version="1.0" encoding="utf-8"?>
+<p:sld xmlns:a="http://schemas.openxmlformats.org/drawingml/2006/main" xmlns:r="http://schemas.openxmlformats.org/officeDocument/2006/relationships" xmlns:p="http://schemas.openxmlformats.org/presentationml/2006/main">
+  <p:cSld>
+    <p:spTree>
+      <p:nvGrpSpPr>
+        <p:cNvPr id="1" name=""/>
+        <p:cNvGrpSpPr/>
+        <p:nvPr/>
+      </p:nvGrpSpPr>
+      <p:grpSpPr>
+        <a:xfrm>
+          <a:off x="0" y="0"/>
+          <a:ext cx="0" cy="0"/>
+          <a:chOff x="0" y="0"/>
+          <a:chExt cx="0" cy="0"/>
+        </a:xfrm>
+      </p:grpSpPr>
+      <p:sp>
+        <p:nvSpPr>
+          <p:cNvPr id="2" name="Title 1">
+            <a:extLst>
+              <a:ext uri="{FF2B5EF4-FFF2-40B4-BE49-F238E27FC236}">
+                <a16:creationId xmlns:a16="http://schemas.microsoft.com/office/drawing/2014/main" id="{6E480F6B-9CAC-743D-13AC-E8FF49238738}"/>
+              </a:ext>
+            </a:extLst>
+          </p:cNvPr>
+          <p:cNvSpPr>
+            <a:spLocks noGrp="1"/>
+          </p:cNvSpPr>
+          <p:nvPr>
+            <p:ph type="title"/>
+          </p:nvPr>
+        </p:nvSpPr>
+        <p:spPr>
+          <a:xfrm>
+            <a:off x="1141413" y="0"/>
+            <a:ext cx="9905998" cy="3313043"/>
+          </a:xfrm>
+        </p:spPr>
+        <p:txBody>
+          <a:bodyPr/>
+          <a:lstStyle/>
+          <a:p>
+            <a:r>
+              <a:rPr lang="en-US" dirty="0"/>
+              <a:t>FUNCTION OF COMPONENTS</a:t>
+            </a:r>
+          </a:p>
+        </p:txBody>
+      </p:sp>
+      <p:pic>
+        <p:nvPicPr>
+          <p:cNvPr id="4" name="Content Placeholder 3">
+            <a:extLst>
+              <a:ext uri="{FF2B5EF4-FFF2-40B4-BE49-F238E27FC236}">
+                <a16:creationId xmlns:a16="http://schemas.microsoft.com/office/drawing/2014/main" id="{36027571-C0A0-80D8-5FFF-EC18E62F10AC}"/>
+              </a:ext>
+            </a:extLst>
+          </p:cNvPr>
+          <p:cNvPicPr>
+            <a:picLocks noGrp="1" noChangeAspect="1"/>
+          </p:cNvPicPr>
+          <p:nvPr>
+            <p:ph idx="1"/>
+          </p:nvPr>
+        </p:nvPicPr>
+        <p:blipFill>
+          <a:blip r:embed="rId2"/>
+          <a:stretch>
+            <a:fillRect/>
+          </a:stretch>
+        </p:blipFill>
+        <p:spPr>
+          <a:xfrm>
+            <a:off x="-15273" y="0"/>
+            <a:ext cx="12315699" cy="6857999"/>
+          </a:xfrm>
+        </p:spPr>
+      </p:pic>
+    </p:spTree>
+    <p:extLst>
+      <p:ext uri="{BB962C8B-B14F-4D97-AF65-F5344CB8AC3E}">
+        <p14:creationId xmlns:p14="http://schemas.microsoft.com/office/powerpoint/2010/main" val="216632474"/>
+      </p:ext>
+    </p:extLst>
+  </p:cSld>
+  <p:clrMapOvr>
+    <a:masterClrMapping/>
+  </p:clrMapOvr>
+</p:sld>
+</file>
+
+<file path=ppt/slides/slide12.xml><?xml version="1.0" encoding="utf-8"?>
 <p:sld xmlns:a="http://schemas.openxmlformats.org/drawingml/2006/main" xmlns:r="http://schemas.openxmlformats.org/officeDocument/2006/relationships" xmlns:p="http://schemas.openxmlformats.org/presentationml/2006/main">
   <p:cSld>
     <p:spTree>
@@ -12674,7 +12929,7 @@
               <a:t>                                 </a:t>
             </a:r>
             <a:r>
-              <a:rPr lang="en-US"/>
+              <a:rPr lang="en-US" dirty="0" err="1"/>
               <a:t>ProTotype</a:t>
             </a:r>
             <a:endParaRPr lang="en-US" dirty="0"/>
@@ -12705,8 +12960,8 @@
         </p:blipFill>
         <p:spPr>
           <a:xfrm>
-            <a:off x="1397503" y="1972821"/>
-            <a:ext cx="5327802" cy="4448401"/>
+            <a:off x="2727155" y="2012756"/>
+            <a:ext cx="7192315" cy="4448401"/>
           </a:xfrm>
         </p:spPr>
       </p:pic>
@@ -12714,124 +12969,6 @@
     <p:extLst>
       <p:ext uri="{BB962C8B-B14F-4D97-AF65-F5344CB8AC3E}">
         <p14:creationId xmlns:p14="http://schemas.microsoft.com/office/powerpoint/2010/main" val="2775011067"/>
-      </p:ext>
-    </p:extLst>
-  </p:cSld>
-  <p:clrMapOvr>
-    <a:masterClrMapping/>
-  </p:clrMapOvr>
-</p:sld>
-</file>
-
-<file path=ppt/slides/slide12.xml><?xml version="1.0" encoding="utf-8"?>
-<p:sld xmlns:a="http://schemas.openxmlformats.org/drawingml/2006/main" xmlns:r="http://schemas.openxmlformats.org/officeDocument/2006/relationships" xmlns:p="http://schemas.openxmlformats.org/presentationml/2006/main">
-  <p:cSld>
-    <p:spTree>
-      <p:nvGrpSpPr>
-        <p:cNvPr id="1" name=""/>
-        <p:cNvGrpSpPr/>
-        <p:nvPr/>
-      </p:nvGrpSpPr>
-      <p:grpSpPr>
-        <a:xfrm>
-          <a:off x="0" y="0"/>
-          <a:ext cx="0" cy="0"/>
-          <a:chOff x="0" y="0"/>
-          <a:chExt cx="0" cy="0"/>
-        </a:xfrm>
-      </p:grpSpPr>
-      <p:sp>
-        <p:nvSpPr>
-          <p:cNvPr id="2" name="Title 1">
-            <a:extLst>
-              <a:ext uri="{FF2B5EF4-FFF2-40B4-BE49-F238E27FC236}">
-                <a16:creationId xmlns:a16="http://schemas.microsoft.com/office/drawing/2014/main" id="{F6489788-8A29-E44C-1119-9D6300574FFA}"/>
-              </a:ext>
-            </a:extLst>
-          </p:cNvPr>
-          <p:cNvSpPr>
-            <a:spLocks noGrp="1"/>
-          </p:cNvSpPr>
-          <p:nvPr>
-            <p:ph type="title"/>
-          </p:nvPr>
-        </p:nvSpPr>
-        <p:spPr/>
-        <p:txBody>
-          <a:bodyPr/>
-          <a:lstStyle/>
-          <a:p>
-            <a:r>
-              <a:rPr lang="en-US" dirty="0"/>
-              <a:t>Advantages</a:t>
-            </a:r>
-          </a:p>
-        </p:txBody>
-      </p:sp>
-      <p:sp>
-        <p:nvSpPr>
-          <p:cNvPr id="3" name="Content Placeholder 2">
-            <a:extLst>
-              <a:ext uri="{FF2B5EF4-FFF2-40B4-BE49-F238E27FC236}">
-                <a16:creationId xmlns:a16="http://schemas.microsoft.com/office/drawing/2014/main" id="{08A79B47-4040-3230-3298-4AFF7E5CD846}"/>
-              </a:ext>
-            </a:extLst>
-          </p:cNvPr>
-          <p:cNvSpPr>
-            <a:spLocks noGrp="1"/>
-          </p:cNvSpPr>
-          <p:nvPr>
-            <p:ph idx="1"/>
-          </p:nvPr>
-        </p:nvSpPr>
-        <p:spPr/>
-        <p:txBody>
-          <a:bodyPr>
-            <a:normAutofit/>
-          </a:bodyPr>
-          <a:lstStyle/>
-          <a:p>
-            <a:r>
-              <a:rPr lang="en-US" dirty="0"/>
-              <a:t>Water Conservation</a:t>
-            </a:r>
-          </a:p>
-          <a:p>
-            <a:r>
-              <a:rPr lang="en-US" dirty="0"/>
-              <a:t>Energy Efficiency</a:t>
-            </a:r>
-          </a:p>
-          <a:p>
-            <a:r>
-              <a:rPr lang="en-US" dirty="0"/>
-              <a:t>Cost Savings</a:t>
-            </a:r>
-          </a:p>
-          <a:p>
-            <a:r>
-              <a:rPr lang="en-US" dirty="0"/>
-              <a:t>Improved Plant Health</a:t>
-            </a:r>
-          </a:p>
-          <a:p>
-            <a:r>
-              <a:rPr lang="en-US" dirty="0"/>
-              <a:t>Environmental Benefits</a:t>
-            </a:r>
-          </a:p>
-          <a:p>
-            <a:r>
-              <a:rPr lang="en-US" dirty="0"/>
-              <a:t>Reliability</a:t>
-            </a:r>
-          </a:p>
-        </p:txBody>
-      </p:sp>
-    </p:spTree>
-    <p:extLst>
-      <p:ext uri="{BB962C8B-B14F-4D97-AF65-F5344CB8AC3E}">
-        <p14:creationId xmlns:p14="http://schemas.microsoft.com/office/powerpoint/2010/main" val="1265432760"/>
       </p:ext>
     </p:extLst>
   </p:cSld>
@@ -12863,7 +13000,7 @@
           <p:cNvPr id="2" name="Title 1">
             <a:extLst>
               <a:ext uri="{FF2B5EF4-FFF2-40B4-BE49-F238E27FC236}">
-                <a16:creationId xmlns:a16="http://schemas.microsoft.com/office/drawing/2014/main" id="{1EEEF886-F233-1FB6-937B-6BBE4A7D0444}"/>
+                <a16:creationId xmlns:a16="http://schemas.microsoft.com/office/drawing/2014/main" id="{03D036F8-8B58-0DA5-432B-2BACFF637936}"/>
               </a:ext>
             </a:extLst>
           </p:cNvPr>
@@ -12880,8 +13017,8 @@
           <a:lstStyle/>
           <a:p>
             <a:r>
-              <a:rPr lang="en-US" dirty="0"/>
-              <a:t>Disadvantages </a:t>
+              <a:rPr lang="en-US"/>
+              <a:t>Applications </a:t>
             </a:r>
           </a:p>
         </p:txBody>
@@ -12891,7 +13028,7 @@
           <p:cNvPr id="3" name="Content Placeholder 2">
             <a:extLst>
               <a:ext uri="{FF2B5EF4-FFF2-40B4-BE49-F238E27FC236}">
-                <a16:creationId xmlns:a16="http://schemas.microsoft.com/office/drawing/2014/main" id="{FA2AB838-8DAE-14BB-86D2-5A7338BF3734}"/>
+                <a16:creationId xmlns:a16="http://schemas.microsoft.com/office/drawing/2014/main" id="{2E847A54-6E56-D084-7F72-BD7D2AF565E2}"/>
               </a:ext>
             </a:extLst>
           </p:cNvPr>
@@ -12902,51 +13039,67 @@
             <p:ph idx="1"/>
           </p:nvPr>
         </p:nvSpPr>
-        <p:spPr/>
+        <p:spPr>
+          <a:xfrm>
+            <a:off x="1322124" y="2097088"/>
+            <a:ext cx="9905999" cy="3541714"/>
+          </a:xfrm>
+        </p:spPr>
         <p:txBody>
-          <a:bodyPr/>
+          <a:bodyPr>
+            <a:normAutofit fontScale="92500" lnSpcReduction="10000"/>
+          </a:bodyPr>
           <a:lstStyle/>
           <a:p>
             <a:r>
               <a:rPr lang="en-US" dirty="0"/>
-              <a:t>Sunlight dependency</a:t>
-            </a:r>
-          </a:p>
-          <a:p>
-            <a:r>
-              <a:rPr lang="en-US" dirty="0"/>
-              <a:t>Power storage limitations</a:t>
-            </a:r>
-          </a:p>
-          <a:p>
-            <a:r>
-              <a:rPr lang="en-US" dirty="0"/>
-              <a:t>Maintenance challenges</a:t>
-            </a:r>
-          </a:p>
-          <a:p>
-            <a:r>
-              <a:rPr lang="en-US" dirty="0"/>
-              <a:t>Weather dependency</a:t>
-            </a:r>
-          </a:p>
-          <a:p>
-            <a:r>
-              <a:rPr lang="en-US" dirty="0"/>
-              <a:t>Technical expertise</a:t>
-            </a:r>
-          </a:p>
-          <a:p>
-            <a:endParaRPr lang="en-US" dirty="0"/>
+              <a:t>These system used in ::</a:t>
+            </a:r>
+          </a:p>
+          <a:p>
+            <a:r>
+              <a:rPr lang="en-US" dirty="0"/>
+              <a:t>Large Farms</a:t>
+            </a:r>
+          </a:p>
+          <a:p>
+            <a:r>
+              <a:rPr lang="en-US" dirty="0"/>
+              <a:t>Gardens-Balcony gardens </a:t>
+            </a:r>
+          </a:p>
+          <a:p>
+            <a:r>
+              <a:rPr lang="en-US" dirty="0"/>
+              <a:t>Nurseries </a:t>
+            </a:r>
+          </a:p>
+          <a:p>
+            <a:r>
+              <a:rPr lang="en-US" dirty="0"/>
+              <a:t>Agriculture farms</a:t>
+            </a:r>
+          </a:p>
+          <a:p>
+            <a:r>
+              <a:rPr lang="en-US" dirty="0"/>
+              <a:t>Green Houses</a:t>
+            </a:r>
+          </a:p>
+          <a:p>
+            <a:r>
+              <a:rPr lang="en-US" dirty="0"/>
+              <a:t>Smart and Drip irrigation systems </a:t>
+            </a:r>
           </a:p>
         </p:txBody>
       </p:sp>
       <p:pic>
         <p:nvPicPr>
-          <p:cNvPr id="5" name="Picture 4">
+          <p:cNvPr id="4" name="Picture 3">
             <a:extLst>
               <a:ext uri="{FF2B5EF4-FFF2-40B4-BE49-F238E27FC236}">
-                <a16:creationId xmlns:a16="http://schemas.microsoft.com/office/drawing/2014/main" id="{25830956-EEE1-87D6-F578-FD1AF2D5FCD1}"/>
+                <a16:creationId xmlns:a16="http://schemas.microsoft.com/office/drawing/2014/main" id="{9F705F7A-BEFB-5925-5D40-E69D145141A5}"/>
               </a:ext>
             </a:extLst>
           </p:cNvPr>
@@ -12963,8 +13116,8 @@
         </p:blipFill>
         <p:spPr>
           <a:xfrm>
-            <a:off x="6455834" y="1404514"/>
-            <a:ext cx="4217940" cy="4386687"/>
+            <a:off x="5951431" y="2192632"/>
+            <a:ext cx="6238979" cy="4665368"/>
           </a:xfrm>
           <a:prstGeom prst="rect">
             <a:avLst/>
@@ -12974,7 +13127,304 @@
     </p:spTree>
     <p:extLst>
       <p:ext uri="{BB962C8B-B14F-4D97-AF65-F5344CB8AC3E}">
-        <p14:creationId xmlns:p14="http://schemas.microsoft.com/office/powerpoint/2010/main" val="4129405989"/>
+        <p14:creationId xmlns:p14="http://schemas.microsoft.com/office/powerpoint/2010/main" val="435342246"/>
+      </p:ext>
+    </p:extLst>
+  </p:cSld>
+  <p:clrMapOvr>
+    <a:masterClrMapping/>
+  </p:clrMapOvr>
+</p:sld>
+</file>
+
+<file path=ppt/slides/slide14.xml><?xml version="1.0" encoding="utf-8"?>
+<p:sld xmlns:a="http://schemas.openxmlformats.org/drawingml/2006/main" xmlns:r="http://schemas.openxmlformats.org/officeDocument/2006/relationships" xmlns:p="http://schemas.openxmlformats.org/presentationml/2006/main">
+  <p:cSld>
+    <p:spTree>
+      <p:nvGrpSpPr>
+        <p:cNvPr id="1" name=""/>
+        <p:cNvGrpSpPr/>
+        <p:nvPr/>
+      </p:nvGrpSpPr>
+      <p:grpSpPr>
+        <a:xfrm>
+          <a:off x="0" y="0"/>
+          <a:ext cx="0" cy="0"/>
+          <a:chOff x="0" y="0"/>
+          <a:chExt cx="0" cy="0"/>
+        </a:xfrm>
+      </p:grpSpPr>
+      <p:sp>
+        <p:nvSpPr>
+          <p:cNvPr id="2" name="Title 1">
+            <a:extLst>
+              <a:ext uri="{FF2B5EF4-FFF2-40B4-BE49-F238E27FC236}">
+                <a16:creationId xmlns:a16="http://schemas.microsoft.com/office/drawing/2014/main" id="{ED0A2728-DF34-B720-C35B-99EFCBB1F351}"/>
+              </a:ext>
+            </a:extLst>
+          </p:cNvPr>
+          <p:cNvSpPr>
+            <a:spLocks noGrp="1"/>
+          </p:cNvSpPr>
+          <p:nvPr>
+            <p:ph type="title"/>
+          </p:nvPr>
+        </p:nvSpPr>
+        <p:spPr/>
+        <p:txBody>
+          <a:bodyPr/>
+          <a:lstStyle/>
+          <a:p>
+            <a:endParaRPr lang="en-US"/>
+          </a:p>
+        </p:txBody>
+      </p:sp>
+      <p:pic>
+        <p:nvPicPr>
+          <p:cNvPr id="4" name="Content Placeholder 3">
+            <a:extLst>
+              <a:ext uri="{FF2B5EF4-FFF2-40B4-BE49-F238E27FC236}">
+                <a16:creationId xmlns:a16="http://schemas.microsoft.com/office/drawing/2014/main" id="{E5311887-114E-FEA4-6523-14506777CD8E}"/>
+              </a:ext>
+            </a:extLst>
+          </p:cNvPr>
+          <p:cNvPicPr>
+            <a:picLocks noGrp="1" noChangeAspect="1"/>
+          </p:cNvPicPr>
+          <p:nvPr>
+            <p:ph idx="1"/>
+          </p:nvPr>
+        </p:nvPicPr>
+        <p:blipFill>
+          <a:blip r:embed="rId2"/>
+          <a:stretch>
+            <a:fillRect/>
+          </a:stretch>
+        </p:blipFill>
+        <p:spPr>
+          <a:xfrm>
+            <a:off x="-144569" y="0"/>
+            <a:ext cx="12336569" cy="6857999"/>
+          </a:xfrm>
+        </p:spPr>
+      </p:pic>
+    </p:spTree>
+    <p:extLst>
+      <p:ext uri="{BB962C8B-B14F-4D97-AF65-F5344CB8AC3E}">
+        <p14:creationId xmlns:p14="http://schemas.microsoft.com/office/powerpoint/2010/main" val="994262131"/>
+      </p:ext>
+    </p:extLst>
+  </p:cSld>
+  <p:clrMapOvr>
+    <a:masterClrMapping/>
+  </p:clrMapOvr>
+</p:sld>
+</file>
+
+<file path=ppt/slides/slide15.xml><?xml version="1.0" encoding="utf-8"?>
+<p:sld xmlns:a="http://schemas.openxmlformats.org/drawingml/2006/main" xmlns:r="http://schemas.openxmlformats.org/officeDocument/2006/relationships" xmlns:p="http://schemas.openxmlformats.org/presentationml/2006/main">
+  <p:cSld>
+    <p:spTree>
+      <p:nvGrpSpPr>
+        <p:cNvPr id="1" name=""/>
+        <p:cNvGrpSpPr/>
+        <p:nvPr/>
+      </p:nvGrpSpPr>
+      <p:grpSpPr>
+        <a:xfrm>
+          <a:off x="0" y="0"/>
+          <a:ext cx="0" cy="0"/>
+          <a:chOff x="0" y="0"/>
+          <a:chExt cx="0" cy="0"/>
+        </a:xfrm>
+      </p:grpSpPr>
+      <p:sp>
+        <p:nvSpPr>
+          <p:cNvPr id="2" name="Title 1">
+            <a:extLst>
+              <a:ext uri="{FF2B5EF4-FFF2-40B4-BE49-F238E27FC236}">
+                <a16:creationId xmlns:a16="http://schemas.microsoft.com/office/drawing/2014/main" id="{459736AA-4354-5DDE-E900-23ED32515990}"/>
+              </a:ext>
+            </a:extLst>
+          </p:cNvPr>
+          <p:cNvSpPr>
+            <a:spLocks noGrp="1"/>
+          </p:cNvSpPr>
+          <p:nvPr>
+            <p:ph type="title"/>
+          </p:nvPr>
+        </p:nvSpPr>
+        <p:spPr>
+          <a:xfrm>
+            <a:off x="1143001" y="0"/>
+            <a:ext cx="9905998" cy="1478570"/>
+          </a:xfrm>
+        </p:spPr>
+        <p:txBody>
+          <a:bodyPr/>
+          <a:lstStyle/>
+          <a:p>
+            <a:r>
+              <a:rPr lang="en-US" dirty="0"/>
+              <a:t>Conclusion </a:t>
+            </a:r>
+          </a:p>
+        </p:txBody>
+      </p:sp>
+      <p:sp>
+        <p:nvSpPr>
+          <p:cNvPr id="3" name="Content Placeholder 2">
+            <a:extLst>
+              <a:ext uri="{FF2B5EF4-FFF2-40B4-BE49-F238E27FC236}">
+                <a16:creationId xmlns:a16="http://schemas.microsoft.com/office/drawing/2014/main" id="{4420F082-85CD-86B7-EF77-9A04D64E98DF}"/>
+              </a:ext>
+            </a:extLst>
+          </p:cNvPr>
+          <p:cNvSpPr>
+            <a:spLocks noGrp="1"/>
+          </p:cNvSpPr>
+          <p:nvPr>
+            <p:ph idx="1"/>
+          </p:nvPr>
+        </p:nvSpPr>
+        <p:spPr>
+          <a:xfrm>
+            <a:off x="748447" y="3873896"/>
+            <a:ext cx="10300552" cy="3541714"/>
+          </a:xfrm>
+        </p:spPr>
+        <p:txBody>
+          <a:bodyPr/>
+          <a:lstStyle/>
+          <a:p>
+            <a:pPr marL="0" indent="0">
+              <a:buNone/>
+            </a:pPr>
+            <a:r>
+              <a:rPr lang="en-US" dirty="0"/>
+              <a:t>A solar-powered automatic plant watering system, powered by a solar panel, offers a reliable, cost-effective, and environmentally friendly solution for plant irrigation. It automates the watering process based on soil moisture levels, reducing manual effort and promoting efficient water usage. This system minimizes water waste, enhances plant health, and can be particularly useful for remote or inaccessible locations. </a:t>
+            </a:r>
+          </a:p>
+        </p:txBody>
+      </p:sp>
+      <p:pic>
+        <p:nvPicPr>
+          <p:cNvPr id="4" name="Picture 3">
+            <a:extLst>
+              <a:ext uri="{FF2B5EF4-FFF2-40B4-BE49-F238E27FC236}">
+                <a16:creationId xmlns:a16="http://schemas.microsoft.com/office/drawing/2014/main" id="{D15B3DD1-433E-3F76-B130-E487EF4D8E57}"/>
+              </a:ext>
+            </a:extLst>
+          </p:cNvPr>
+          <p:cNvPicPr>
+            <a:picLocks noChangeAspect="1"/>
+          </p:cNvPicPr>
+          <p:nvPr/>
+        </p:nvPicPr>
+        <p:blipFill>
+          <a:blip r:embed="rId2"/>
+          <a:stretch>
+            <a:fillRect/>
+          </a:stretch>
+        </p:blipFill>
+        <p:spPr>
+          <a:xfrm>
+            <a:off x="-84332" y="-120474"/>
+            <a:ext cx="12276332" cy="3782893"/>
+          </a:xfrm>
+          <a:prstGeom prst="rect">
+            <a:avLst/>
+          </a:prstGeom>
+        </p:spPr>
+      </p:pic>
+    </p:spTree>
+    <p:extLst>
+      <p:ext uri="{BB962C8B-B14F-4D97-AF65-F5344CB8AC3E}">
+        <p14:creationId xmlns:p14="http://schemas.microsoft.com/office/powerpoint/2010/main" val="3193770877"/>
+      </p:ext>
+    </p:extLst>
+  </p:cSld>
+  <p:clrMapOvr>
+    <a:masterClrMapping/>
+  </p:clrMapOvr>
+</p:sld>
+</file>
+
+<file path=ppt/slides/slide16.xml><?xml version="1.0" encoding="utf-8"?>
+<p:sld xmlns:a="http://schemas.openxmlformats.org/drawingml/2006/main" xmlns:r="http://schemas.openxmlformats.org/officeDocument/2006/relationships" xmlns:p="http://schemas.openxmlformats.org/presentationml/2006/main">
+  <p:cSld>
+    <p:spTree>
+      <p:nvGrpSpPr>
+        <p:cNvPr id="1" name=""/>
+        <p:cNvGrpSpPr/>
+        <p:nvPr/>
+      </p:nvGrpSpPr>
+      <p:grpSpPr>
+        <a:xfrm>
+          <a:off x="0" y="0"/>
+          <a:ext cx="0" cy="0"/>
+          <a:chOff x="0" y="0"/>
+          <a:chExt cx="0" cy="0"/>
+        </a:xfrm>
+      </p:grpSpPr>
+      <p:sp>
+        <p:nvSpPr>
+          <p:cNvPr id="2" name="Title 1">
+            <a:extLst>
+              <a:ext uri="{FF2B5EF4-FFF2-40B4-BE49-F238E27FC236}">
+                <a16:creationId xmlns:a16="http://schemas.microsoft.com/office/drawing/2014/main" id="{6857F991-B2AF-5A08-2019-41B9145E4E61}"/>
+              </a:ext>
+            </a:extLst>
+          </p:cNvPr>
+          <p:cNvSpPr>
+            <a:spLocks noGrp="1"/>
+          </p:cNvSpPr>
+          <p:nvPr>
+            <p:ph type="title"/>
+          </p:nvPr>
+        </p:nvSpPr>
+        <p:spPr/>
+        <p:txBody>
+          <a:bodyPr/>
+          <a:lstStyle/>
+          <a:p>
+            <a:endParaRPr lang="en-US"/>
+          </a:p>
+        </p:txBody>
+      </p:sp>
+      <p:pic>
+        <p:nvPicPr>
+          <p:cNvPr id="4" name="Content Placeholder 3">
+            <a:extLst>
+              <a:ext uri="{FF2B5EF4-FFF2-40B4-BE49-F238E27FC236}">
+                <a16:creationId xmlns:a16="http://schemas.microsoft.com/office/drawing/2014/main" id="{082316E2-FC05-9FA4-12D1-7FB2D4B49383}"/>
+              </a:ext>
+            </a:extLst>
+          </p:cNvPr>
+          <p:cNvPicPr>
+            <a:picLocks noGrp="1" noChangeAspect="1"/>
+          </p:cNvPicPr>
+          <p:nvPr>
+            <p:ph idx="1"/>
+          </p:nvPr>
+        </p:nvPicPr>
+        <p:blipFill>
+          <a:blip r:embed="rId2"/>
+          <a:stretch>
+            <a:fillRect/>
+          </a:stretch>
+        </p:blipFill>
+        <p:spPr>
+          <a:xfrm>
+            <a:off x="-84332" y="-120474"/>
+            <a:ext cx="12276331" cy="6978474"/>
+          </a:xfrm>
+        </p:spPr>
+      </p:pic>
+    </p:spTree>
+    <p:extLst>
+      <p:ext uri="{BB962C8B-B14F-4D97-AF65-F5344CB8AC3E}">
+        <p14:creationId xmlns:p14="http://schemas.microsoft.com/office/powerpoint/2010/main" val="1674236526"/>
       </p:ext>
     </p:extLst>
   </p:cSld>
@@ -13121,6 +13571,36 @@
           </a:p>
         </p:txBody>
       </p:sp>
+      <p:pic>
+        <p:nvPicPr>
+          <p:cNvPr id="4" name="Picture 3">
+            <a:extLst>
+              <a:ext uri="{FF2B5EF4-FFF2-40B4-BE49-F238E27FC236}">
+                <a16:creationId xmlns:a16="http://schemas.microsoft.com/office/drawing/2014/main" id="{DEA73B8D-61FB-44BA-45C5-0DA11D4D6CC9}"/>
+              </a:ext>
+            </a:extLst>
+          </p:cNvPr>
+          <p:cNvPicPr>
+            <a:picLocks noChangeAspect="1"/>
+          </p:cNvPicPr>
+          <p:nvPr/>
+        </p:nvPicPr>
+        <p:blipFill>
+          <a:blip r:embed="rId2"/>
+          <a:stretch>
+            <a:fillRect/>
+          </a:stretch>
+        </p:blipFill>
+        <p:spPr>
+          <a:xfrm>
+            <a:off x="1249839" y="2601158"/>
+            <a:ext cx="4501222" cy="3975652"/>
+          </a:xfrm>
+          <a:prstGeom prst="rect">
+            <a:avLst/>
+          </a:prstGeom>
+        </p:spPr>
+      </p:pic>
     </p:spTree>
     <p:extLst>
       <p:ext uri="{BB962C8B-B14F-4D97-AF65-F5344CB8AC3E}">
@@ -13174,7 +13654,7 @@
           <a:p>
             <a:r>
               <a:rPr lang="en-US" dirty="0"/>
-              <a:t>Contents </a:t>
+              <a:t>                              Contents </a:t>
             </a:r>
           </a:p>
         </p:txBody>
@@ -13195,7 +13675,12 @@
             <p:ph idx="1"/>
           </p:nvPr>
         </p:nvSpPr>
-        <p:spPr/>
+        <p:spPr>
+          <a:xfrm>
+            <a:off x="5623057" y="2249486"/>
+            <a:ext cx="9905999" cy="3541714"/>
+          </a:xfrm>
+        </p:spPr>
         <p:txBody>
           <a:bodyPr>
             <a:normAutofit/>
@@ -13222,20 +13707,53 @@
           <a:p>
             <a:r>
               <a:rPr lang="en-US" dirty="0"/>
-              <a:t>DEFINE </a:t>
-            </a:r>
-          </a:p>
-          <a:p>
-            <a:r>
-              <a:rPr lang="en-US" dirty="0"/>
-              <a:t>IDEATE</a:t>
-            </a:r>
-          </a:p>
-          <a:p>
-            <a:endParaRPr lang="en-US" dirty="0"/>
+              <a:t>APPLICATIONS</a:t>
+            </a:r>
+          </a:p>
+          <a:p>
+            <a:r>
+              <a:rPr lang="en-US" dirty="0"/>
+              <a:t>FUTURE ENHANCEMENT</a:t>
+            </a:r>
+          </a:p>
+          <a:p>
+            <a:r>
+              <a:rPr lang="en-US" dirty="0"/>
+              <a:t>CONCLUSION </a:t>
+            </a:r>
           </a:p>
         </p:txBody>
       </p:sp>
+      <p:pic>
+        <p:nvPicPr>
+          <p:cNvPr id="4" name="Picture 3">
+            <a:extLst>
+              <a:ext uri="{FF2B5EF4-FFF2-40B4-BE49-F238E27FC236}">
+                <a16:creationId xmlns:a16="http://schemas.microsoft.com/office/drawing/2014/main" id="{D1810BC5-2EE4-BCE3-41DB-C45539AEE473}"/>
+              </a:ext>
+            </a:extLst>
+          </p:cNvPr>
+          <p:cNvPicPr>
+            <a:picLocks noChangeAspect="1"/>
+          </p:cNvPicPr>
+          <p:nvPr/>
+        </p:nvPicPr>
+        <p:blipFill>
+          <a:blip r:embed="rId2"/>
+          <a:stretch>
+            <a:fillRect/>
+          </a:stretch>
+        </p:blipFill>
+        <p:spPr>
+          <a:xfrm>
+            <a:off x="504444" y="2381416"/>
+            <a:ext cx="4698415" cy="3409784"/>
+          </a:xfrm>
+          <a:prstGeom prst="rect">
+            <a:avLst/>
+          </a:prstGeom>
+        </p:spPr>
+      </p:pic>
     </p:spTree>
     <p:extLst>
       <p:ext uri="{BB962C8B-B14F-4D97-AF65-F5344CB8AC3E}">
@@ -13388,7 +13906,7 @@
           <p:cNvPr id="2" name="Title 1">
             <a:extLst>
               <a:ext uri="{FF2B5EF4-FFF2-40B4-BE49-F238E27FC236}">
-                <a16:creationId xmlns:a16="http://schemas.microsoft.com/office/drawing/2014/main" id="{117307D5-D578-B9FD-61AE-D166EEBD15D3}"/>
+                <a16:creationId xmlns:a16="http://schemas.microsoft.com/office/drawing/2014/main" id="{31C5C223-8867-A4AE-3EB7-377D0CF950E2}"/>
               </a:ext>
             </a:extLst>
           </p:cNvPr>
@@ -13406,7 +13924,7 @@
           <a:p>
             <a:r>
               <a:rPr lang="en-US" dirty="0"/>
-              <a:t>Problem statement </a:t>
+              <a:t>                                 Empathy</a:t>
             </a:r>
           </a:p>
         </p:txBody>
@@ -13416,7 +13934,7 @@
           <p:cNvPr id="3" name="Content Placeholder 2">
             <a:extLst>
               <a:ext uri="{FF2B5EF4-FFF2-40B4-BE49-F238E27FC236}">
-                <a16:creationId xmlns:a16="http://schemas.microsoft.com/office/drawing/2014/main" id="{A30E5B62-57FB-5FFD-CFD9-106D193A05F6}"/>
+                <a16:creationId xmlns:a16="http://schemas.microsoft.com/office/drawing/2014/main" id="{1C799027-4AFF-6E33-1578-373E4B3CFF91}"/>
               </a:ext>
             </a:extLst>
           </p:cNvPr>
@@ -13427,41 +13945,78 @@
             <p:ph idx="1"/>
           </p:nvPr>
         </p:nvSpPr>
-        <p:spPr/>
+        <p:spPr>
+          <a:xfrm>
+            <a:off x="7490408" y="2893491"/>
+            <a:ext cx="9905999" cy="3899754"/>
+          </a:xfrm>
+        </p:spPr>
         <p:txBody>
-          <a:bodyPr>
-            <a:normAutofit fontScale="92500"/>
-          </a:bodyPr>
+          <a:bodyPr/>
           <a:lstStyle/>
           <a:p>
             <a:r>
               <a:rPr lang="en-US" dirty="0"/>
-              <a:t>During day to day activities many people often forget to water their plants and thus it becomes challenging for them to keep their plants healthy and alive. </a:t>
-            </a:r>
-          </a:p>
-          <a:p>
-            <a:r>
-              <a:rPr lang="en-US" dirty="0"/>
-              <a:t>Also it is a challenge for farmers to maintain their fields and manage watering of plants during shortage of water. </a:t>
-            </a:r>
-          </a:p>
-          <a:p>
-            <a:r>
-              <a:rPr lang="en-US" dirty="0"/>
-              <a:t>Based on the above background, we thought that it is necessary to implement the automated system which will take care of plants considering all the different aspects of home </a:t>
-            </a:r>
-            <a:r>
-              <a:rPr lang="en-US"/>
-              <a:t>gardening system.</a:t>
-            </a:r>
+              <a:t>PLANTCARE CHALLENGES </a:t>
+            </a:r>
+          </a:p>
+          <a:p>
+            <a:r>
+              <a:rPr lang="en-US" dirty="0"/>
+              <a:t>INTERVIEW QUESTIONS </a:t>
+            </a:r>
+          </a:p>
+          <a:p>
+            <a:r>
+              <a:rPr lang="en-US" dirty="0"/>
+              <a:t>PERSON’S FEEDBACK </a:t>
+            </a:r>
+          </a:p>
+          <a:p>
+            <a:endParaRPr lang="en-US" dirty="0"/>
+          </a:p>
+          <a:p>
+            <a:pPr marL="0" indent="0">
+              <a:buNone/>
+            </a:pPr>
             <a:endParaRPr lang="en-US" dirty="0"/>
           </a:p>
         </p:txBody>
       </p:sp>
+      <p:pic>
+        <p:nvPicPr>
+          <p:cNvPr id="4" name="Picture 3">
+            <a:extLst>
+              <a:ext uri="{FF2B5EF4-FFF2-40B4-BE49-F238E27FC236}">
+                <a16:creationId xmlns:a16="http://schemas.microsoft.com/office/drawing/2014/main" id="{9E69DE2E-DE16-EBB6-372A-1EAB15D9711B}"/>
+              </a:ext>
+            </a:extLst>
+          </p:cNvPr>
+          <p:cNvPicPr>
+            <a:picLocks noChangeAspect="1"/>
+          </p:cNvPicPr>
+          <p:nvPr/>
+        </p:nvPicPr>
+        <p:blipFill>
+          <a:blip r:embed="rId2"/>
+          <a:stretch>
+            <a:fillRect/>
+          </a:stretch>
+        </p:blipFill>
+        <p:spPr>
+          <a:xfrm>
+            <a:off x="337328" y="2097088"/>
+            <a:ext cx="6373090" cy="4388510"/>
+          </a:xfrm>
+          <a:prstGeom prst="rect">
+            <a:avLst/>
+          </a:prstGeom>
+        </p:spPr>
+      </p:pic>
     </p:spTree>
     <p:extLst>
       <p:ext uri="{BB962C8B-B14F-4D97-AF65-F5344CB8AC3E}">
-        <p14:creationId xmlns:p14="http://schemas.microsoft.com/office/powerpoint/2010/main" val="3026556115"/>
+        <p14:creationId xmlns:p14="http://schemas.microsoft.com/office/powerpoint/2010/main" val="3230907619"/>
       </p:ext>
     </p:extLst>
   </p:cSld>
@@ -13493,7 +14048,7 @@
           <p:cNvPr id="2" name="Title 1">
             <a:extLst>
               <a:ext uri="{FF2B5EF4-FFF2-40B4-BE49-F238E27FC236}">
-                <a16:creationId xmlns:a16="http://schemas.microsoft.com/office/drawing/2014/main" id="{E9356028-0982-592C-A5DB-91DA7B059A05}"/>
+                <a16:creationId xmlns:a16="http://schemas.microsoft.com/office/drawing/2014/main" id="{629B60A0-9D68-525F-6933-25B40BC4F026}"/>
               </a:ext>
             </a:extLst>
           </p:cNvPr>
@@ -13509,10 +14064,7 @@
           <a:bodyPr/>
           <a:lstStyle/>
           <a:p>
-            <a:r>
-              <a:rPr lang="en-US" dirty="0"/>
-              <a:t>Introduction </a:t>
-            </a:r>
+            <a:endParaRPr lang="en-US"/>
           </a:p>
         </p:txBody>
       </p:sp>
@@ -13521,7 +14073,7 @@
           <p:cNvPr id="4" name="Content Placeholder 3">
             <a:extLst>
               <a:ext uri="{FF2B5EF4-FFF2-40B4-BE49-F238E27FC236}">
-                <a16:creationId xmlns:a16="http://schemas.microsoft.com/office/drawing/2014/main" id="{078923E8-0DD6-2F07-4E10-CD29CDAAE0CB}"/>
+                <a16:creationId xmlns:a16="http://schemas.microsoft.com/office/drawing/2014/main" id="{7CC072DF-D79F-D113-7181-E0430EEB4E56}"/>
               </a:ext>
             </a:extLst>
           </p:cNvPr>
@@ -13540,15 +14092,15 @@
         </p:blipFill>
         <p:spPr>
           <a:xfrm>
-            <a:off x="1141413" y="1505930"/>
-            <a:ext cx="9761512" cy="4733552"/>
+            <a:off x="0" y="0"/>
+            <a:ext cx="12191999" cy="6858000"/>
           </a:xfrm>
         </p:spPr>
       </p:pic>
     </p:spTree>
     <p:extLst>
       <p:ext uri="{BB962C8B-B14F-4D97-AF65-F5344CB8AC3E}">
-        <p14:creationId xmlns:p14="http://schemas.microsoft.com/office/powerpoint/2010/main" val="3102854977"/>
+        <p14:creationId xmlns:p14="http://schemas.microsoft.com/office/powerpoint/2010/main" val="1288165236"/>
       </p:ext>
     </p:extLst>
   </p:cSld>
@@ -13559,104 +14111,6 @@
 </file>
 
 <file path=ppt/slides/slide7.xml><?xml version="1.0" encoding="utf-8"?>
-<p:sld xmlns:a="http://schemas.openxmlformats.org/drawingml/2006/main" xmlns:r="http://schemas.openxmlformats.org/officeDocument/2006/relationships" xmlns:p="http://schemas.openxmlformats.org/presentationml/2006/main">
-  <p:cSld>
-    <p:spTree>
-      <p:nvGrpSpPr>
-        <p:cNvPr id="1" name=""/>
-        <p:cNvGrpSpPr/>
-        <p:nvPr/>
-      </p:nvGrpSpPr>
-      <p:grpSpPr>
-        <a:xfrm>
-          <a:off x="0" y="0"/>
-          <a:ext cx="0" cy="0"/>
-          <a:chOff x="0" y="0"/>
-          <a:chExt cx="0" cy="0"/>
-        </a:xfrm>
-      </p:grpSpPr>
-      <p:sp>
-        <p:nvSpPr>
-          <p:cNvPr id="2" name="Title 1">
-            <a:extLst>
-              <a:ext uri="{FF2B5EF4-FFF2-40B4-BE49-F238E27FC236}">
-                <a16:creationId xmlns:a16="http://schemas.microsoft.com/office/drawing/2014/main" id="{31C5C223-8867-A4AE-3EB7-377D0CF950E2}"/>
-              </a:ext>
-            </a:extLst>
-          </p:cNvPr>
-          <p:cNvSpPr>
-            <a:spLocks noGrp="1"/>
-          </p:cNvSpPr>
-          <p:nvPr>
-            <p:ph type="title"/>
-          </p:nvPr>
-        </p:nvSpPr>
-        <p:spPr/>
-        <p:txBody>
-          <a:bodyPr/>
-          <a:lstStyle/>
-          <a:p>
-            <a:r>
-              <a:rPr lang="en-US" dirty="0"/>
-              <a:t>Empathy</a:t>
-            </a:r>
-          </a:p>
-        </p:txBody>
-      </p:sp>
-      <p:sp>
-        <p:nvSpPr>
-          <p:cNvPr id="3" name="Content Placeholder 2">
-            <a:extLst>
-              <a:ext uri="{FF2B5EF4-FFF2-40B4-BE49-F238E27FC236}">
-                <a16:creationId xmlns:a16="http://schemas.microsoft.com/office/drawing/2014/main" id="{1C799027-4AFF-6E33-1578-373E4B3CFF91}"/>
-              </a:ext>
-            </a:extLst>
-          </p:cNvPr>
-          <p:cNvSpPr>
-            <a:spLocks noGrp="1"/>
-          </p:cNvSpPr>
-          <p:nvPr>
-            <p:ph idx="1"/>
-          </p:nvPr>
-        </p:nvSpPr>
-        <p:spPr/>
-        <p:txBody>
-          <a:bodyPr/>
-          <a:lstStyle/>
-          <a:p>
-            <a:r>
-              <a:rPr lang="en-US" dirty="0"/>
-              <a:t>INTERVIEW QUESTIONS</a:t>
-            </a:r>
-          </a:p>
-          <a:p>
-            <a:r>
-              <a:rPr lang="en-US" dirty="0"/>
-              <a:t>PERSON’S FEEDBACK</a:t>
-            </a:r>
-          </a:p>
-          <a:p>
-            <a:pPr marL="0" indent="0">
-              <a:buNone/>
-            </a:pPr>
-            <a:endParaRPr lang="en-US" dirty="0"/>
-          </a:p>
-        </p:txBody>
-      </p:sp>
-    </p:spTree>
-    <p:extLst>
-      <p:ext uri="{BB962C8B-B14F-4D97-AF65-F5344CB8AC3E}">
-        <p14:creationId xmlns:p14="http://schemas.microsoft.com/office/powerpoint/2010/main" val="3230907619"/>
-      </p:ext>
-    </p:extLst>
-  </p:cSld>
-  <p:clrMapOvr>
-    <a:masterClrMapping/>
-  </p:clrMapOvr>
-</p:sld>
-</file>
-
-<file path=ppt/slides/slide8.xml><?xml version="1.0" encoding="utf-8"?>
 <p:sld xmlns:a="http://schemas.openxmlformats.org/drawingml/2006/main" xmlns:r="http://schemas.openxmlformats.org/officeDocument/2006/relationships" xmlns:p="http://schemas.openxmlformats.org/presentationml/2006/main">
   <p:cSld>
     <p:spTree>
@@ -13689,7 +14143,12 @@
             <p:ph type="title"/>
           </p:nvPr>
         </p:nvSpPr>
-        <p:spPr/>
+        <p:spPr>
+          <a:xfrm>
+            <a:off x="1334172" y="0"/>
+            <a:ext cx="9905998" cy="1478570"/>
+          </a:xfrm>
+        </p:spPr>
         <p:txBody>
           <a:bodyPr/>
           <a:lstStyle/>
@@ -13717,6 +14176,172 @@
             <p:ph idx="1"/>
           </p:nvPr>
         </p:nvSpPr>
+        <p:spPr>
+          <a:xfrm>
+            <a:off x="5177301" y="1658143"/>
+            <a:ext cx="9905999" cy="3541714"/>
+          </a:xfrm>
+        </p:spPr>
+        <p:txBody>
+          <a:bodyPr>
+            <a:normAutofit fontScale="92500" lnSpcReduction="10000"/>
+          </a:bodyPr>
+          <a:lstStyle/>
+          <a:p>
+            <a:r>
+              <a:rPr lang="en-US" dirty="0"/>
+              <a:t> What type of garden do you maintain?</a:t>
+            </a:r>
+          </a:p>
+          <a:p>
+            <a:r>
+              <a:rPr lang="en-US" dirty="0"/>
+              <a:t> How often do you water your plants?</a:t>
+            </a:r>
+          </a:p>
+          <a:p>
+            <a:r>
+              <a:rPr lang="en-US" dirty="0"/>
+              <a:t>What time of the day do you usually water your plants? </a:t>
+            </a:r>
+          </a:p>
+          <a:p>
+            <a:r>
+              <a:rPr lang="en-US" dirty="0"/>
+              <a:t>How much water do you usually apply to each plant? </a:t>
+            </a:r>
+          </a:p>
+          <a:p>
+            <a:r>
+              <a:rPr lang="en-US" dirty="0"/>
+              <a:t>What method do you use for watering?</a:t>
+            </a:r>
+          </a:p>
+          <a:p>
+            <a:r>
+              <a:rPr lang="en-US" dirty="0"/>
+              <a:t> How do you decide when a plant needs water? </a:t>
+            </a:r>
+          </a:p>
+          <a:p>
+            <a:r>
+              <a:rPr lang="en-US" dirty="0"/>
+              <a:t>Have you faced any challenges with watering? </a:t>
+            </a:r>
+          </a:p>
+        </p:txBody>
+      </p:sp>
+      <p:pic>
+        <p:nvPicPr>
+          <p:cNvPr id="5" name="Picture 4">
+            <a:extLst>
+              <a:ext uri="{FF2B5EF4-FFF2-40B4-BE49-F238E27FC236}">
+                <a16:creationId xmlns:a16="http://schemas.microsoft.com/office/drawing/2014/main" id="{86DC9405-84EF-8B39-A3CA-32368843BB79}"/>
+              </a:ext>
+            </a:extLst>
+          </p:cNvPr>
+          <p:cNvPicPr>
+            <a:picLocks noChangeAspect="1"/>
+          </p:cNvPicPr>
+          <p:nvPr/>
+        </p:nvPicPr>
+        <p:blipFill>
+          <a:blip r:embed="rId2"/>
+          <a:stretch>
+            <a:fillRect/>
+          </a:stretch>
+        </p:blipFill>
+        <p:spPr>
+          <a:xfrm>
+            <a:off x="483814" y="1658143"/>
+            <a:ext cx="4257780" cy="3579870"/>
+          </a:xfrm>
+          <a:prstGeom prst="rect">
+            <a:avLst/>
+          </a:prstGeom>
+        </p:spPr>
+      </p:pic>
+    </p:spTree>
+    <p:extLst>
+      <p:ext uri="{BB962C8B-B14F-4D97-AF65-F5344CB8AC3E}">
+        <p14:creationId xmlns:p14="http://schemas.microsoft.com/office/powerpoint/2010/main" val="531951970"/>
+      </p:ext>
+    </p:extLst>
+  </p:cSld>
+  <p:clrMapOvr>
+    <a:masterClrMapping/>
+  </p:clrMapOvr>
+</p:sld>
+</file>
+
+<file path=ppt/slides/slide8.xml><?xml version="1.0" encoding="utf-8"?>
+<p:sld xmlns:a="http://schemas.openxmlformats.org/drawingml/2006/main" xmlns:r="http://schemas.openxmlformats.org/officeDocument/2006/relationships" xmlns:p="http://schemas.openxmlformats.org/presentationml/2006/main">
+  <p:cSld>
+    <p:spTree>
+      <p:nvGrpSpPr>
+        <p:cNvPr id="1" name=""/>
+        <p:cNvGrpSpPr/>
+        <p:nvPr/>
+      </p:nvGrpSpPr>
+      <p:grpSpPr>
+        <a:xfrm>
+          <a:off x="0" y="0"/>
+          <a:ext cx="0" cy="0"/>
+          <a:chOff x="0" y="0"/>
+          <a:chExt cx="0" cy="0"/>
+        </a:xfrm>
+      </p:grpSpPr>
+      <p:sp>
+        <p:nvSpPr>
+          <p:cNvPr id="2" name="Title 1">
+            <a:extLst>
+              <a:ext uri="{FF2B5EF4-FFF2-40B4-BE49-F238E27FC236}">
+                <a16:creationId xmlns:a16="http://schemas.microsoft.com/office/drawing/2014/main" id="{9A440245-50B8-8188-364A-8643E59B6341}"/>
+              </a:ext>
+            </a:extLst>
+          </p:cNvPr>
+          <p:cNvSpPr>
+            <a:spLocks noGrp="1"/>
+          </p:cNvSpPr>
+          <p:nvPr>
+            <p:ph type="title"/>
+          </p:nvPr>
+        </p:nvSpPr>
+        <p:spPr/>
+        <p:txBody>
+          <a:bodyPr/>
+          <a:lstStyle/>
+          <a:p>
+            <a:r>
+              <a:rPr lang="en-US" dirty="0"/>
+              <a:t>PERSON’S FEEDBACK </a:t>
+            </a:r>
+            <a:br>
+              <a:rPr lang="en-US" dirty="0"/>
+            </a:br>
+            <a:r>
+              <a:rPr lang="en-US" dirty="0"/>
+              <a:t>PERSON-1</a:t>
+            </a:r>
+          </a:p>
+        </p:txBody>
+      </p:sp>
+      <p:sp>
+        <p:nvSpPr>
+          <p:cNvPr id="3" name="Content Placeholder 2">
+            <a:extLst>
+              <a:ext uri="{FF2B5EF4-FFF2-40B4-BE49-F238E27FC236}">
+                <a16:creationId xmlns:a16="http://schemas.microsoft.com/office/drawing/2014/main" id="{D463772A-0314-8DC9-C458-B77075A6967E}"/>
+              </a:ext>
+            </a:extLst>
+          </p:cNvPr>
+          <p:cNvSpPr>
+            <a:spLocks noGrp="1"/>
+          </p:cNvSpPr>
+          <p:nvPr>
+            <p:ph idx="1"/>
+          </p:nvPr>
+        </p:nvSpPr>
         <p:spPr/>
         <p:txBody>
           <a:bodyPr>
@@ -13724,53 +14349,87 @@
           </a:bodyPr>
           <a:lstStyle/>
           <a:p>
-            <a:r>
-              <a:rPr lang="en-US" dirty="0"/>
-              <a:t> What type of garden do you maintain?</a:t>
-            </a:r>
-          </a:p>
-          <a:p>
-            <a:r>
-              <a:rPr lang="en-US" dirty="0"/>
-              <a:t> How often do you water your plants?</a:t>
-            </a:r>
-          </a:p>
-          <a:p>
-            <a:r>
-              <a:rPr lang="en-US" dirty="0"/>
-              <a:t>What time of the day do you usually water your plants? </a:t>
-            </a:r>
-          </a:p>
-          <a:p>
-            <a:r>
-              <a:rPr lang="en-US" dirty="0"/>
-              <a:t>How much water do you usually apply to each plant? </a:t>
-            </a:r>
-          </a:p>
-          <a:p>
-            <a:r>
-              <a:rPr lang="en-US" dirty="0"/>
-              <a:t>What method do you use for watering?</a:t>
-            </a:r>
-          </a:p>
-          <a:p>
-            <a:r>
-              <a:rPr lang="en-US" dirty="0"/>
-              <a:t> How do you decide when a plant needs water? </a:t>
-            </a:r>
-          </a:p>
-          <a:p>
-            <a:r>
-              <a:rPr lang="en-US" dirty="0"/>
-              <a:t>Have you faced any challenges with watering? </a:t>
-            </a:r>
+            <a:pPr marL="457200" indent="-457200">
+              <a:buFont typeface="+mj-lt"/>
+              <a:buAutoNum type="arabicPeriod"/>
+            </a:pPr>
+            <a:r>
+              <a:rPr lang="en-US" dirty="0"/>
+              <a:t>I maintain a flower gardening.</a:t>
+            </a:r>
+          </a:p>
+          <a:p>
+            <a:pPr marL="457200" indent="-457200">
+              <a:buFont typeface="+mj-lt"/>
+              <a:buAutoNum type="arabicPeriod"/>
+            </a:pPr>
+            <a:r>
+              <a:rPr lang="en-US" dirty="0"/>
+              <a:t>I water my plants every other day.</a:t>
+            </a:r>
+          </a:p>
+          <a:p>
+            <a:pPr marL="457200" indent="-457200">
+              <a:buFont typeface="+mj-lt"/>
+              <a:buAutoNum type="arabicPeriod"/>
+            </a:pPr>
+            <a:r>
+              <a:rPr lang="en-US" dirty="0"/>
+              <a:t>I usually water my plants in the early morning.</a:t>
+            </a:r>
+          </a:p>
+          <a:p>
+            <a:pPr marL="457200" indent="-457200">
+              <a:buFont typeface="+mj-lt"/>
+              <a:buAutoNum type="arabicPeriod"/>
+            </a:pPr>
+            <a:r>
+              <a:rPr lang="en-US" dirty="0"/>
+              <a:t>I apply about a one liter of water to every plant.</a:t>
+            </a:r>
+          </a:p>
+          <a:p>
+            <a:pPr marL="457200" indent="-457200">
+              <a:buFont typeface="+mj-lt"/>
+              <a:buAutoNum type="arabicPeriod"/>
+            </a:pPr>
+            <a:r>
+              <a:rPr lang="en-US" dirty="0"/>
+              <a:t>I use a watering can With a long spout.</a:t>
+            </a:r>
+          </a:p>
+          <a:p>
+            <a:pPr marL="457200" indent="-457200">
+              <a:buFont typeface="+mj-lt"/>
+              <a:buAutoNum type="arabicPeriod"/>
+            </a:pPr>
+            <a:r>
+              <a:rPr lang="en-US" dirty="0"/>
+              <a:t>I decide based on the soil moisture.</a:t>
+            </a:r>
+          </a:p>
+          <a:p>
+            <a:pPr marL="457200" indent="-457200">
+              <a:buFont typeface="+mj-lt"/>
+              <a:buAutoNum type="arabicPeriod"/>
+            </a:pPr>
+            <a:r>
+              <a:rPr lang="en-US" dirty="0"/>
+              <a:t>Yes I have faced challenges With overwatering during rainy season.</a:t>
+            </a:r>
+          </a:p>
+          <a:p>
+            <a:pPr marL="0" indent="0">
+              <a:buNone/>
+            </a:pPr>
+            <a:endParaRPr lang="en-US" dirty="0"/>
           </a:p>
         </p:txBody>
       </p:sp>
     </p:spTree>
     <p:extLst>
       <p:ext uri="{BB962C8B-B14F-4D97-AF65-F5344CB8AC3E}">
-        <p14:creationId xmlns:p14="http://schemas.microsoft.com/office/powerpoint/2010/main" val="531951970"/>
+        <p14:creationId xmlns:p14="http://schemas.microsoft.com/office/powerpoint/2010/main" val="69095893"/>
       </p:ext>
     </p:extLst>
   </p:cSld>
@@ -13802,7 +14461,7 @@
           <p:cNvPr id="2" name="Title 1">
             <a:extLst>
               <a:ext uri="{FF2B5EF4-FFF2-40B4-BE49-F238E27FC236}">
-                <a16:creationId xmlns:a16="http://schemas.microsoft.com/office/drawing/2014/main" id="{2B28BB1D-57F8-8547-2E42-D7B49CB89052}"/>
+                <a16:creationId xmlns:a16="http://schemas.microsoft.com/office/drawing/2014/main" id="{89BC487E-F833-124C-6E11-CE5A778CC07A}"/>
               </a:ext>
             </a:extLst>
           </p:cNvPr>
@@ -13813,86 +14472,137 @@
             <p:ph type="title"/>
           </p:nvPr>
         </p:nvSpPr>
-        <p:spPr>
-          <a:xfrm>
-            <a:off x="1143001" y="0"/>
-            <a:ext cx="9905998" cy="1478570"/>
-          </a:xfrm>
-        </p:spPr>
+        <p:spPr/>
         <p:txBody>
           <a:bodyPr/>
           <a:lstStyle/>
           <a:p>
             <a:r>
               <a:rPr lang="en-US" dirty="0"/>
-              <a:t>Components used</a:t>
+              <a:t>PerSon-2</a:t>
+            </a:r>
+            <a:br>
+              <a:rPr lang="en-US" dirty="0"/>
+            </a:br>
+            <a:r>
+              <a:rPr lang="en-US" dirty="0"/>
+              <a:t>Feedback</a:t>
             </a:r>
           </a:p>
         </p:txBody>
       </p:sp>
-      <p:pic>
-        <p:nvPicPr>
-          <p:cNvPr id="4" name="Content Placeholder 3">
+      <p:sp>
+        <p:nvSpPr>
+          <p:cNvPr id="3" name="Content Placeholder 2">
             <a:extLst>
               <a:ext uri="{FF2B5EF4-FFF2-40B4-BE49-F238E27FC236}">
-                <a16:creationId xmlns:a16="http://schemas.microsoft.com/office/drawing/2014/main" id="{4709F9F1-ED81-50BF-02D4-69861AE7E49C}"/>
+                <a16:creationId xmlns:a16="http://schemas.microsoft.com/office/drawing/2014/main" id="{DCC67ACE-5ED9-9422-E30F-523B01D84522}"/>
               </a:ext>
             </a:extLst>
           </p:cNvPr>
-          <p:cNvPicPr>
-            <a:picLocks noGrp="1" noChangeAspect="1"/>
-          </p:cNvPicPr>
+          <p:cNvSpPr>
+            <a:spLocks noGrp="1"/>
+          </p:cNvSpPr>
           <p:nvPr>
             <p:ph idx="1"/>
           </p:nvPr>
-        </p:nvPicPr>
-        <p:blipFill>
-          <a:blip r:embed="rId2"/>
-          <a:stretch>
-            <a:fillRect/>
-          </a:stretch>
-        </p:blipFill>
-        <p:spPr>
-          <a:xfrm>
-            <a:off x="6816311" y="1357803"/>
-            <a:ext cx="4555824" cy="2569485"/>
-          </a:xfrm>
-        </p:spPr>
-      </p:pic>
-      <p:pic>
-        <p:nvPicPr>
-          <p:cNvPr id="6" name="Picture 5">
-            <a:extLst>
-              <a:ext uri="{FF2B5EF4-FFF2-40B4-BE49-F238E27FC236}">
-                <a16:creationId xmlns:a16="http://schemas.microsoft.com/office/drawing/2014/main" id="{68D3FBDB-AC53-C4BA-5C4C-30FFDFE85943}"/>
-              </a:ext>
-            </a:extLst>
-          </p:cNvPr>
-          <p:cNvPicPr>
-            <a:picLocks noChangeAspect="1"/>
-          </p:cNvPicPr>
-          <p:nvPr/>
-        </p:nvPicPr>
-        <p:blipFill>
-          <a:blip r:embed="rId3"/>
-          <a:stretch>
-            <a:fillRect/>
-          </a:stretch>
-        </p:blipFill>
-        <p:spPr>
-          <a:xfrm>
-            <a:off x="1770972" y="4447679"/>
-            <a:ext cx="3072095" cy="2097087"/>
-          </a:xfrm>
-          <a:prstGeom prst="rect">
-            <a:avLst/>
-          </a:prstGeom>
-        </p:spPr>
-      </p:pic>
+        </p:nvSpPr>
+        <p:spPr/>
+        <p:txBody>
+          <a:bodyPr>
+            <a:normAutofit fontScale="92500" lnSpcReduction="10000"/>
+          </a:bodyPr>
+          <a:lstStyle/>
+          <a:p>
+            <a:pPr marL="457200" indent="-457200">
+              <a:buFont typeface="+mj-lt"/>
+              <a:buAutoNum type="arabicPeriod"/>
+            </a:pPr>
+            <a:r>
+              <a:rPr lang="en-US" dirty="0"/>
+              <a:t>Maintains a terrace gardening.</a:t>
+            </a:r>
+          </a:p>
+          <a:p>
+            <a:pPr marL="457200" indent="-457200">
+              <a:buFont typeface="+mj-lt"/>
+              <a:buAutoNum type="arabicPeriod"/>
+            </a:pPr>
+            <a:r>
+              <a:rPr lang="en-US" dirty="0"/>
+              <a:t>Depends upon the weather twice a week.</a:t>
+            </a:r>
+          </a:p>
+          <a:p>
+            <a:pPr marL="457200" indent="-457200">
+              <a:buFont typeface="+mj-lt"/>
+              <a:buAutoNum type="arabicPeriod"/>
+            </a:pPr>
+            <a:r>
+              <a:rPr lang="en-US" dirty="0"/>
+              <a:t>Usually water the plants in the late afternoon.</a:t>
+            </a:r>
+          </a:p>
+          <a:p>
+            <a:pPr marL="457200" indent="-457200">
+              <a:buFont typeface="+mj-lt"/>
+              <a:buAutoNum type="arabicPeriod"/>
+            </a:pPr>
+            <a:r>
+              <a:rPr lang="en-US" dirty="0"/>
+              <a:t>Quarter liter of water to small plants.</a:t>
+            </a:r>
+          </a:p>
+          <a:p>
+            <a:pPr marL="457200" indent="-457200">
+              <a:buFont typeface="+mj-lt"/>
+              <a:buAutoNum type="arabicPeriod"/>
+            </a:pPr>
+            <a:r>
+              <a:rPr lang="en-US" dirty="0"/>
+              <a:t>Normal process.</a:t>
+            </a:r>
+          </a:p>
+          <a:p>
+            <a:pPr marL="457200" indent="-457200">
+              <a:buFont typeface="+mj-lt"/>
+              <a:buAutoNum type="arabicPeriod"/>
+            </a:pPr>
+            <a:r>
+              <a:rPr lang="en-US" dirty="0"/>
+              <a:t>Based upon the plants appearance and soil conditions.</a:t>
+            </a:r>
+          </a:p>
+          <a:p>
+            <a:pPr marL="457200" indent="-457200">
+              <a:buFont typeface="+mj-lt"/>
+              <a:buAutoNum type="arabicPeriod"/>
+            </a:pPr>
+            <a:r>
+              <a:rPr lang="en-US" dirty="0"/>
+              <a:t>Faced challenges With </a:t>
+            </a:r>
+            <a:r>
+              <a:rPr lang="en-US" dirty="0" err="1"/>
+              <a:t>underwatering</a:t>
+            </a:r>
+            <a:r>
+              <a:rPr lang="en-US" dirty="0"/>
+              <a:t> during summer season.</a:t>
+            </a:r>
+          </a:p>
+          <a:p>
+            <a:pPr marL="0" indent="0">
+              <a:buNone/>
+            </a:pPr>
+            <a:endParaRPr lang="en-US" dirty="0"/>
+          </a:p>
+        </p:txBody>
+      </p:sp>
     </p:spTree>
     <p:extLst>
       <p:ext uri="{BB962C8B-B14F-4D97-AF65-F5344CB8AC3E}">
-        <p14:creationId xmlns:p14="http://schemas.microsoft.com/office/powerpoint/2010/main" val="136746177"/>
+        <p14:creationId xmlns:p14="http://schemas.microsoft.com/office/powerpoint/2010/main" val="1821022523"/>
       </p:ext>
     </p:extLst>
   </p:cSld>

--- a/public/team_presentations/team_7_presentation.pptx
+++ b/public/team_presentations/team_7_presentation.pptx
@@ -9,14 +9,14 @@
     <p:sldId id="259" r:id="rId3"/>
     <p:sldId id="260" r:id="rId4"/>
     <p:sldId id="261" r:id="rId5"/>
-    <p:sldId id="263" r:id="rId6"/>
-    <p:sldId id="271" r:id="rId7"/>
-    <p:sldId id="265" r:id="rId8"/>
-    <p:sldId id="275" r:id="rId9"/>
-    <p:sldId id="274" r:id="rId10"/>
-    <p:sldId id="266" r:id="rId11"/>
-    <p:sldId id="270" r:id="rId12"/>
-    <p:sldId id="264" r:id="rId13"/>
+    <p:sldId id="277" r:id="rId6"/>
+    <p:sldId id="263" r:id="rId7"/>
+    <p:sldId id="271" r:id="rId8"/>
+    <p:sldId id="265" r:id="rId9"/>
+    <p:sldId id="275" r:id="rId10"/>
+    <p:sldId id="274" r:id="rId11"/>
+    <p:sldId id="266" r:id="rId12"/>
+    <p:sldId id="270" r:id="rId13"/>
     <p:sldId id="268" r:id="rId14"/>
     <p:sldId id="272" r:id="rId15"/>
     <p:sldId id="269" r:id="rId16"/>
@@ -172,7 +172,7 @@
           <a:noFill/>
           <a:extLst>
             <a:ext uri="{909E8E84-426E-40dd-AFC4-6F175D3DCCD1}">
-              <a14:hiddenFill xmlns:a14="http://schemas.microsoft.com/office/drawing/2010/main" xmlns="">
+              <a14:hiddenFill xmlns="" xmlns:a14="http://schemas.microsoft.com/office/drawing/2010/main">
                 <a:solidFill>
                   <a:srgbClr val="FFFFFF"/>
                 </a:solidFill>
@@ -232,7 +232,7 @@
             </a:ln>
             <a:extLst>
               <a:ext uri="{91240B29-F687-4f45-9708-019B960494DF}">
-                <a14:hiddenLine xmlns:a14="http://schemas.microsoft.com/office/drawing/2010/main" xmlns="" w="9525">
+                <a14:hiddenLine xmlns="" xmlns:a14="http://schemas.microsoft.com/office/drawing/2010/main" w="9525">
                   <a:solidFill>
                     <a:srgbClr val="000000"/>
                   </a:solidFill>
@@ -322,7 +322,7 @@
             </a:ln>
             <a:extLst>
               <a:ext uri="{91240B29-F687-4f45-9708-019B960494DF}">
-                <a14:hiddenLine xmlns:a14="http://schemas.microsoft.com/office/drawing/2010/main" xmlns="" w="9525">
+                <a14:hiddenLine xmlns="" xmlns:a14="http://schemas.microsoft.com/office/drawing/2010/main" w="9525">
                   <a:solidFill>
                     <a:srgbClr val="000000"/>
                   </a:solidFill>
@@ -412,7 +412,7 @@
             </a:ln>
             <a:extLst>
               <a:ext uri="{91240B29-F687-4f45-9708-019B960494DF}">
-                <a14:hiddenLine xmlns:a14="http://schemas.microsoft.com/office/drawing/2010/main" xmlns="" w="9525">
+                <a14:hiddenLine xmlns="" xmlns:a14="http://schemas.microsoft.com/office/drawing/2010/main" w="9525">
                   <a:solidFill>
                     <a:srgbClr val="000000"/>
                   </a:solidFill>
@@ -446,7 +446,7 @@
             </a:ln>
             <a:extLst>
               <a:ext uri="{91240B29-F687-4f45-9708-019B960494DF}">
-                <a14:hiddenLine xmlns:a14="http://schemas.microsoft.com/office/drawing/2010/main" xmlns="" w="9525">
+                <a14:hiddenLine xmlns="" xmlns:a14="http://schemas.microsoft.com/office/drawing/2010/main" w="9525">
                   <a:solidFill>
                     <a:srgbClr val="000000"/>
                   </a:solidFill>
@@ -536,7 +536,7 @@
             </a:ln>
             <a:extLst>
               <a:ext uri="{91240B29-F687-4f45-9708-019B960494DF}">
-                <a14:hiddenLine xmlns:a14="http://schemas.microsoft.com/office/drawing/2010/main" xmlns="" w="9525">
+                <a14:hiddenLine xmlns="" xmlns:a14="http://schemas.microsoft.com/office/drawing/2010/main" w="9525">
                   <a:solidFill>
                     <a:srgbClr val="000000"/>
                   </a:solidFill>
@@ -598,7 +598,7 @@
             </a:ln>
             <a:extLst>
               <a:ext uri="{91240B29-F687-4f45-9708-019B960494DF}">
-                <a14:hiddenLine xmlns:a14="http://schemas.microsoft.com/office/drawing/2010/main" xmlns="" w="9525">
+                <a14:hiddenLine xmlns="" xmlns:a14="http://schemas.microsoft.com/office/drawing/2010/main" w="9525">
                   <a:solidFill>
                     <a:srgbClr val="000000"/>
                   </a:solidFill>
@@ -660,7 +660,7 @@
             </a:ln>
             <a:extLst>
               <a:ext uri="{91240B29-F687-4f45-9708-019B960494DF}">
-                <a14:hiddenLine xmlns:a14="http://schemas.microsoft.com/office/drawing/2010/main" xmlns="" w="9525">
+                <a14:hiddenLine xmlns="" xmlns:a14="http://schemas.microsoft.com/office/drawing/2010/main" w="9525">
                   <a:solidFill>
                     <a:srgbClr val="000000"/>
                   </a:solidFill>
@@ -750,7 +750,7 @@
             </a:ln>
             <a:extLst>
               <a:ext uri="{91240B29-F687-4f45-9708-019B960494DF}">
-                <a14:hiddenLine xmlns:a14="http://schemas.microsoft.com/office/drawing/2010/main" xmlns="" w="9525">
+                <a14:hiddenLine xmlns="" xmlns:a14="http://schemas.microsoft.com/office/drawing/2010/main" w="9525">
                   <a:solidFill>
                     <a:srgbClr val="000000"/>
                   </a:solidFill>
@@ -812,7 +812,7 @@
             </a:ln>
             <a:extLst>
               <a:ext uri="{91240B29-F687-4f45-9708-019B960494DF}">
-                <a14:hiddenLine xmlns:a14="http://schemas.microsoft.com/office/drawing/2010/main" xmlns="" w="9525">
+                <a14:hiddenLine xmlns="" xmlns:a14="http://schemas.microsoft.com/office/drawing/2010/main" w="9525">
                   <a:solidFill>
                     <a:srgbClr val="000000"/>
                   </a:solidFill>
@@ -874,7 +874,7 @@
             </a:ln>
             <a:extLst>
               <a:ext uri="{91240B29-F687-4f45-9708-019B960494DF}">
-                <a14:hiddenLine xmlns:a14="http://schemas.microsoft.com/office/drawing/2010/main" xmlns="" w="9525">
+                <a14:hiddenLine xmlns="" xmlns:a14="http://schemas.microsoft.com/office/drawing/2010/main" w="9525">
                   <a:solidFill>
                     <a:srgbClr val="000000"/>
                   </a:solidFill>
@@ -964,7 +964,7 @@
             </a:ln>
             <a:extLst>
               <a:ext uri="{91240B29-F687-4f45-9708-019B960494DF}">
-                <a14:hiddenLine xmlns:a14="http://schemas.microsoft.com/office/drawing/2010/main" xmlns="" w="9525">
+                <a14:hiddenLine xmlns="" xmlns:a14="http://schemas.microsoft.com/office/drawing/2010/main" w="9525">
                   <a:solidFill>
                     <a:srgbClr val="000000"/>
                   </a:solidFill>
@@ -1054,7 +1054,7 @@
             </a:ln>
             <a:extLst>
               <a:ext uri="{91240B29-F687-4f45-9708-019B960494DF}">
-                <a14:hiddenLine xmlns:a14="http://schemas.microsoft.com/office/drawing/2010/main" xmlns="" w="9525">
+                <a14:hiddenLine xmlns="" xmlns:a14="http://schemas.microsoft.com/office/drawing/2010/main" w="9525">
                   <a:solidFill>
                     <a:srgbClr val="000000"/>
                   </a:solidFill>
@@ -1116,7 +1116,7 @@
             </a:ln>
             <a:extLst>
               <a:ext uri="{91240B29-F687-4f45-9708-019B960494DF}">
-                <a14:hiddenLine xmlns:a14="http://schemas.microsoft.com/office/drawing/2010/main" xmlns="" w="9525">
+                <a14:hiddenLine xmlns="" xmlns:a14="http://schemas.microsoft.com/office/drawing/2010/main" w="9525">
                   <a:solidFill>
                     <a:srgbClr val="000000"/>
                   </a:solidFill>
@@ -1226,7 +1226,7 @@
             </a:ln>
             <a:extLst>
               <a:ext uri="{91240B29-F687-4f45-9708-019B960494DF}">
-                <a14:hiddenLine xmlns:a14="http://schemas.microsoft.com/office/drawing/2010/main" xmlns="" w="9525">
+                <a14:hiddenLine xmlns="" xmlns:a14="http://schemas.microsoft.com/office/drawing/2010/main" w="9525">
                   <a:solidFill>
                     <a:srgbClr val="000000"/>
                   </a:solidFill>
@@ -1288,7 +1288,7 @@
             </a:ln>
             <a:extLst>
               <a:ext uri="{91240B29-F687-4f45-9708-019B960494DF}">
-                <a14:hiddenLine xmlns:a14="http://schemas.microsoft.com/office/drawing/2010/main" xmlns="" w="9525">
+                <a14:hiddenLine xmlns="" xmlns:a14="http://schemas.microsoft.com/office/drawing/2010/main" w="9525">
                   <a:solidFill>
                     <a:srgbClr val="000000"/>
                   </a:solidFill>
@@ -1378,7 +1378,7 @@
             </a:ln>
             <a:extLst>
               <a:ext uri="{91240B29-F687-4f45-9708-019B960494DF}">
-                <a14:hiddenLine xmlns:a14="http://schemas.microsoft.com/office/drawing/2010/main" xmlns="" w="9525">
+                <a14:hiddenLine xmlns="" xmlns:a14="http://schemas.microsoft.com/office/drawing/2010/main" w="9525">
                   <a:solidFill>
                     <a:srgbClr val="000000"/>
                   </a:solidFill>
@@ -1468,7 +1468,7 @@
             </a:ln>
             <a:extLst>
               <a:ext uri="{91240B29-F687-4f45-9708-019B960494DF}">
-                <a14:hiddenLine xmlns:a14="http://schemas.microsoft.com/office/drawing/2010/main" xmlns="" w="9525">
+                <a14:hiddenLine xmlns="" xmlns:a14="http://schemas.microsoft.com/office/drawing/2010/main" w="9525">
                   <a:solidFill>
                     <a:srgbClr val="000000"/>
                   </a:solidFill>
@@ -1530,7 +1530,7 @@
             </a:ln>
             <a:extLst>
               <a:ext uri="{91240B29-F687-4f45-9708-019B960494DF}">
-                <a14:hiddenLine xmlns:a14="http://schemas.microsoft.com/office/drawing/2010/main" xmlns="" w="9525">
+                <a14:hiddenLine xmlns="" xmlns:a14="http://schemas.microsoft.com/office/drawing/2010/main" w="9525">
                   <a:solidFill>
                     <a:srgbClr val="000000"/>
                   </a:solidFill>
@@ -1620,7 +1620,7 @@
             </a:ln>
             <a:extLst>
               <a:ext uri="{91240B29-F687-4f45-9708-019B960494DF}">
-                <a14:hiddenLine xmlns:a14="http://schemas.microsoft.com/office/drawing/2010/main" xmlns="" w="9525">
+                <a14:hiddenLine xmlns="" xmlns:a14="http://schemas.microsoft.com/office/drawing/2010/main" w="9525">
                   <a:solidFill>
                     <a:srgbClr val="000000"/>
                   </a:solidFill>
@@ -1710,7 +1710,7 @@
             </a:ln>
             <a:extLst>
               <a:ext uri="{91240B29-F687-4f45-9708-019B960494DF}">
-                <a14:hiddenLine xmlns:a14="http://schemas.microsoft.com/office/drawing/2010/main" xmlns="" w="9525">
+                <a14:hiddenLine xmlns="" xmlns:a14="http://schemas.microsoft.com/office/drawing/2010/main" w="9525">
                   <a:solidFill>
                     <a:srgbClr val="000000"/>
                   </a:solidFill>
@@ -1766,7 +1766,7 @@
             </a:ln>
             <a:extLst>
               <a:ext uri="{91240B29-F687-4f45-9708-019B960494DF}">
-                <a14:hiddenLine xmlns:a14="http://schemas.microsoft.com/office/drawing/2010/main" xmlns="" w="9525">
+                <a14:hiddenLine xmlns="" xmlns:a14="http://schemas.microsoft.com/office/drawing/2010/main" w="9525">
                   <a:solidFill>
                     <a:srgbClr val="000000"/>
                   </a:solidFill>
@@ -1856,7 +1856,7 @@
             </a:ln>
             <a:extLst>
               <a:ext uri="{91240B29-F687-4f45-9708-019B960494DF}">
-                <a14:hiddenLine xmlns:a14="http://schemas.microsoft.com/office/drawing/2010/main" xmlns="" w="9525">
+                <a14:hiddenLine xmlns="" xmlns:a14="http://schemas.microsoft.com/office/drawing/2010/main" w="9525">
                   <a:solidFill>
                     <a:srgbClr val="000000"/>
                   </a:solidFill>
@@ -1912,7 +1912,7 @@
             </a:ln>
             <a:extLst>
               <a:ext uri="{91240B29-F687-4f45-9708-019B960494DF}">
-                <a14:hiddenLine xmlns:a14="http://schemas.microsoft.com/office/drawing/2010/main" xmlns="" w="9525">
+                <a14:hiddenLine xmlns="" xmlns:a14="http://schemas.microsoft.com/office/drawing/2010/main" w="9525">
                   <a:solidFill>
                     <a:srgbClr val="000000"/>
                   </a:solidFill>
@@ -2002,7 +2002,7 @@
             </a:ln>
             <a:extLst>
               <a:ext uri="{91240B29-F687-4f45-9708-019B960494DF}">
-                <a14:hiddenLine xmlns:a14="http://schemas.microsoft.com/office/drawing/2010/main" xmlns="" w="9525">
+                <a14:hiddenLine xmlns="" xmlns:a14="http://schemas.microsoft.com/office/drawing/2010/main" w="9525">
                   <a:solidFill>
                     <a:srgbClr val="000000"/>
                   </a:solidFill>
@@ -2070,7 +2070,7 @@
             </a:ln>
             <a:extLst>
               <a:ext uri="{91240B29-F687-4f45-9708-019B960494DF}">
-                <a14:hiddenLine xmlns:a14="http://schemas.microsoft.com/office/drawing/2010/main" xmlns="" w="9525">
+                <a14:hiddenLine xmlns="" xmlns:a14="http://schemas.microsoft.com/office/drawing/2010/main" w="9525">
                   <a:solidFill>
                     <a:srgbClr val="000000"/>
                   </a:solidFill>
@@ -2160,7 +2160,7 @@
             </a:ln>
             <a:extLst>
               <a:ext uri="{91240B29-F687-4f45-9708-019B960494DF}">
-                <a14:hiddenLine xmlns:a14="http://schemas.microsoft.com/office/drawing/2010/main" xmlns="" w="9525">
+                <a14:hiddenLine xmlns="" xmlns:a14="http://schemas.microsoft.com/office/drawing/2010/main" w="9525">
                   <a:solidFill>
                     <a:srgbClr val="000000"/>
                   </a:solidFill>
@@ -2228,7 +2228,7 @@
             </a:ln>
             <a:extLst>
               <a:ext uri="{91240B29-F687-4f45-9708-019B960494DF}">
-                <a14:hiddenLine xmlns:a14="http://schemas.microsoft.com/office/drawing/2010/main" xmlns="" w="9525">
+                <a14:hiddenLine xmlns="" xmlns:a14="http://schemas.microsoft.com/office/drawing/2010/main" w="9525">
                   <a:solidFill>
                     <a:srgbClr val="000000"/>
                   </a:solidFill>
@@ -2318,7 +2318,7 @@
             </a:ln>
             <a:extLst>
               <a:ext uri="{91240B29-F687-4f45-9708-019B960494DF}">
-                <a14:hiddenLine xmlns:a14="http://schemas.microsoft.com/office/drawing/2010/main" xmlns="" w="9525">
+                <a14:hiddenLine xmlns="" xmlns:a14="http://schemas.microsoft.com/office/drawing/2010/main" w="9525">
                   <a:solidFill>
                     <a:srgbClr val="000000"/>
                   </a:solidFill>
@@ -2352,7 +2352,7 @@
             </a:ln>
             <a:extLst>
               <a:ext uri="{91240B29-F687-4f45-9708-019B960494DF}">
-                <a14:hiddenLine xmlns:a14="http://schemas.microsoft.com/office/drawing/2010/main" xmlns="" w="9525">
+                <a14:hiddenLine xmlns="" xmlns:a14="http://schemas.microsoft.com/office/drawing/2010/main" w="9525">
                   <a:solidFill>
                     <a:srgbClr val="000000"/>
                   </a:solidFill>
@@ -2442,7 +2442,7 @@
             </a:ln>
             <a:extLst>
               <a:ext uri="{91240B29-F687-4f45-9708-019B960494DF}">
-                <a14:hiddenLine xmlns:a14="http://schemas.microsoft.com/office/drawing/2010/main" xmlns="" w="9525">
+                <a14:hiddenLine xmlns="" xmlns:a14="http://schemas.microsoft.com/office/drawing/2010/main" w="9525">
                   <a:solidFill>
                     <a:srgbClr val="000000"/>
                   </a:solidFill>
@@ -2504,7 +2504,7 @@
             </a:ln>
             <a:extLst>
               <a:ext uri="{91240B29-F687-4f45-9708-019B960494DF}">
-                <a14:hiddenLine xmlns:a14="http://schemas.microsoft.com/office/drawing/2010/main" xmlns="" w="9525">
+                <a14:hiddenLine xmlns="" xmlns:a14="http://schemas.microsoft.com/office/drawing/2010/main" w="9525">
                   <a:solidFill>
                     <a:srgbClr val="000000"/>
                   </a:solidFill>
@@ -2566,7 +2566,7 @@
             </a:ln>
             <a:extLst>
               <a:ext uri="{91240B29-F687-4f45-9708-019B960494DF}">
-                <a14:hiddenLine xmlns:a14="http://schemas.microsoft.com/office/drawing/2010/main" xmlns="" w="9525">
+                <a14:hiddenLine xmlns="" xmlns:a14="http://schemas.microsoft.com/office/drawing/2010/main" w="9525">
                   <a:solidFill>
                     <a:srgbClr val="000000"/>
                   </a:solidFill>
@@ -2656,7 +2656,7 @@
             </a:ln>
             <a:extLst>
               <a:ext uri="{91240B29-F687-4f45-9708-019B960494DF}">
-                <a14:hiddenLine xmlns:a14="http://schemas.microsoft.com/office/drawing/2010/main" xmlns="" w="9525">
+                <a14:hiddenLine xmlns="" xmlns:a14="http://schemas.microsoft.com/office/drawing/2010/main" w="9525">
                   <a:solidFill>
                     <a:srgbClr val="000000"/>
                   </a:solidFill>
@@ -2724,7 +2724,7 @@
             </a:ln>
             <a:extLst>
               <a:ext uri="{91240B29-F687-4f45-9708-019B960494DF}">
-                <a14:hiddenLine xmlns:a14="http://schemas.microsoft.com/office/drawing/2010/main" xmlns="" w="9525">
+                <a14:hiddenLine xmlns="" xmlns:a14="http://schemas.microsoft.com/office/drawing/2010/main" w="9525">
                   <a:solidFill>
                     <a:srgbClr val="000000"/>
                   </a:solidFill>
@@ -2786,7 +2786,7 @@
             </a:ln>
             <a:extLst>
               <a:ext uri="{91240B29-F687-4f45-9708-019B960494DF}">
-                <a14:hiddenLine xmlns:a14="http://schemas.microsoft.com/office/drawing/2010/main" xmlns="" w="9525">
+                <a14:hiddenLine xmlns="" xmlns:a14="http://schemas.microsoft.com/office/drawing/2010/main" w="9525">
                   <a:solidFill>
                     <a:srgbClr val="000000"/>
                   </a:solidFill>
@@ -2876,7 +2876,7 @@
             </a:ln>
             <a:extLst>
               <a:ext uri="{91240B29-F687-4f45-9708-019B960494DF}">
-                <a14:hiddenLine xmlns:a14="http://schemas.microsoft.com/office/drawing/2010/main" xmlns="" w="9525">
+                <a14:hiddenLine xmlns="" xmlns:a14="http://schemas.microsoft.com/office/drawing/2010/main" w="9525">
                   <a:solidFill>
                     <a:srgbClr val="000000"/>
                   </a:solidFill>
@@ -2938,7 +2938,7 @@
             </a:ln>
             <a:extLst>
               <a:ext uri="{91240B29-F687-4f45-9708-019B960494DF}">
-                <a14:hiddenLine xmlns:a14="http://schemas.microsoft.com/office/drawing/2010/main" xmlns="" w="9525">
+                <a14:hiddenLine xmlns="" xmlns:a14="http://schemas.microsoft.com/office/drawing/2010/main" w="9525">
                   <a:solidFill>
                     <a:srgbClr val="000000"/>
                   </a:solidFill>
@@ -3028,7 +3028,7 @@
             </a:ln>
             <a:extLst>
               <a:ext uri="{91240B29-F687-4f45-9708-019B960494DF}">
-                <a14:hiddenLine xmlns:a14="http://schemas.microsoft.com/office/drawing/2010/main" xmlns="" w="9525">
+                <a14:hiddenLine xmlns="" xmlns:a14="http://schemas.microsoft.com/office/drawing/2010/main" w="9525">
                   <a:solidFill>
                     <a:srgbClr val="000000"/>
                   </a:solidFill>
@@ -3090,7 +3090,7 @@
             </a:ln>
             <a:extLst>
               <a:ext uri="{91240B29-F687-4f45-9708-019B960494DF}">
-                <a14:hiddenLine xmlns:a14="http://schemas.microsoft.com/office/drawing/2010/main" xmlns="" w="9525">
+                <a14:hiddenLine xmlns="" xmlns:a14="http://schemas.microsoft.com/office/drawing/2010/main" w="9525">
                   <a:solidFill>
                     <a:srgbClr val="000000"/>
                   </a:solidFill>
@@ -3180,7 +3180,7 @@
             </a:ln>
             <a:extLst>
               <a:ext uri="{91240B29-F687-4f45-9708-019B960494DF}">
-                <a14:hiddenLine xmlns:a14="http://schemas.microsoft.com/office/drawing/2010/main" xmlns="" w="9525">
+                <a14:hiddenLine xmlns="" xmlns:a14="http://schemas.microsoft.com/office/drawing/2010/main" w="9525">
                   <a:solidFill>
                     <a:srgbClr val="000000"/>
                   </a:solidFill>
@@ -3214,7 +3214,7 @@
             </a:ln>
             <a:extLst>
               <a:ext uri="{91240B29-F687-4f45-9708-019B960494DF}">
-                <a14:hiddenLine xmlns:a14="http://schemas.microsoft.com/office/drawing/2010/main" xmlns="" w="9525">
+                <a14:hiddenLine xmlns="" xmlns:a14="http://schemas.microsoft.com/office/drawing/2010/main" w="9525">
                   <a:solidFill>
                     <a:srgbClr val="000000"/>
                   </a:solidFill>
@@ -3279,7 +3279,7 @@
             </a:ln>
             <a:extLst>
               <a:ext uri="{91240B29-F687-4f45-9708-019B960494DF}">
-                <a14:hiddenLine xmlns:a14="http://schemas.microsoft.com/office/drawing/2010/main" xmlns="" w="9525">
+                <a14:hiddenLine xmlns="" xmlns:a14="http://schemas.microsoft.com/office/drawing/2010/main" w="9525">
                   <a:solidFill>
                     <a:srgbClr val="000000"/>
                   </a:solidFill>
@@ -3369,7 +3369,7 @@
             </a:ln>
             <a:extLst>
               <a:ext uri="{91240B29-F687-4f45-9708-019B960494DF}">
-                <a14:hiddenLine xmlns:a14="http://schemas.microsoft.com/office/drawing/2010/main" xmlns="" w="9525">
+                <a14:hiddenLine xmlns="" xmlns:a14="http://schemas.microsoft.com/office/drawing/2010/main" w="9525">
                   <a:solidFill>
                     <a:srgbClr val="000000"/>
                   </a:solidFill>
@@ -3431,7 +3431,7 @@
             </a:ln>
             <a:extLst>
               <a:ext uri="{91240B29-F687-4f45-9708-019B960494DF}">
-                <a14:hiddenLine xmlns:a14="http://schemas.microsoft.com/office/drawing/2010/main" xmlns="" w="9525">
+                <a14:hiddenLine xmlns="" xmlns:a14="http://schemas.microsoft.com/office/drawing/2010/main" w="9525">
                   <a:solidFill>
                     <a:srgbClr val="000000"/>
                   </a:solidFill>
@@ -3521,7 +3521,7 @@
             </a:ln>
             <a:extLst>
               <a:ext uri="{91240B29-F687-4f45-9708-019B960494DF}">
-                <a14:hiddenLine xmlns:a14="http://schemas.microsoft.com/office/drawing/2010/main" xmlns="" w="9525">
+                <a14:hiddenLine xmlns="" xmlns:a14="http://schemas.microsoft.com/office/drawing/2010/main" w="9525">
                   <a:solidFill>
                     <a:srgbClr val="000000"/>
                   </a:solidFill>
@@ -3611,7 +3611,7 @@
             </a:ln>
             <a:extLst>
               <a:ext uri="{91240B29-F687-4f45-9708-019B960494DF}">
-                <a14:hiddenLine xmlns:a14="http://schemas.microsoft.com/office/drawing/2010/main" xmlns="" w="9525">
+                <a14:hiddenLine xmlns="" xmlns:a14="http://schemas.microsoft.com/office/drawing/2010/main" w="9525">
                   <a:solidFill>
                     <a:srgbClr val="000000"/>
                   </a:solidFill>
@@ -3676,7 +3676,7 @@
             </a:ln>
             <a:extLst>
               <a:ext uri="{91240B29-F687-4f45-9708-019B960494DF}">
-                <a14:hiddenLine xmlns:a14="http://schemas.microsoft.com/office/drawing/2010/main" xmlns="" w="9525">
+                <a14:hiddenLine xmlns="" xmlns:a14="http://schemas.microsoft.com/office/drawing/2010/main" w="9525">
                   <a:solidFill>
                     <a:srgbClr val="000000"/>
                   </a:solidFill>
@@ -3738,7 +3738,7 @@
             </a:ln>
             <a:extLst>
               <a:ext uri="{91240B29-F687-4f45-9708-019B960494DF}">
-                <a14:hiddenLine xmlns:a14="http://schemas.microsoft.com/office/drawing/2010/main" xmlns="" w="9525">
+                <a14:hiddenLine xmlns="" xmlns:a14="http://schemas.microsoft.com/office/drawing/2010/main" w="9525">
                   <a:solidFill>
                     <a:srgbClr val="000000"/>
                   </a:solidFill>
@@ -3828,7 +3828,7 @@
             </a:ln>
             <a:extLst>
               <a:ext uri="{91240B29-F687-4f45-9708-019B960494DF}">
-                <a14:hiddenLine xmlns:a14="http://schemas.microsoft.com/office/drawing/2010/main" xmlns="" w="9525">
+                <a14:hiddenLine xmlns="" xmlns:a14="http://schemas.microsoft.com/office/drawing/2010/main" w="9525">
                   <a:solidFill>
                     <a:srgbClr val="000000"/>
                   </a:solidFill>
@@ -3918,7 +3918,7 @@
             </a:ln>
             <a:extLst>
               <a:ext uri="{91240B29-F687-4f45-9708-019B960494DF}">
-                <a14:hiddenLine xmlns:a14="http://schemas.microsoft.com/office/drawing/2010/main" xmlns="" w="9525">
+                <a14:hiddenLine xmlns="" xmlns:a14="http://schemas.microsoft.com/office/drawing/2010/main" w="9525">
                   <a:solidFill>
                     <a:srgbClr val="000000"/>
                   </a:solidFill>
@@ -3980,7 +3980,7 @@
             </a:ln>
             <a:extLst>
               <a:ext uri="{91240B29-F687-4f45-9708-019B960494DF}">
-                <a14:hiddenLine xmlns:a14="http://schemas.microsoft.com/office/drawing/2010/main" xmlns="" w="9525">
+                <a14:hiddenLine xmlns="" xmlns:a14="http://schemas.microsoft.com/office/drawing/2010/main" w="9525">
                   <a:solidFill>
                     <a:srgbClr val="000000"/>
                   </a:solidFill>
@@ -4100,7 +4100,7 @@
             </a:ln>
             <a:extLst>
               <a:ext uri="{91240B29-F687-4f45-9708-019B960494DF}">
-                <a14:hiddenLine xmlns:a14="http://schemas.microsoft.com/office/drawing/2010/main" xmlns="" w="9525">
+                <a14:hiddenLine xmlns="" xmlns:a14="http://schemas.microsoft.com/office/drawing/2010/main" w="9525">
                   <a:solidFill>
                     <a:srgbClr val="000000"/>
                   </a:solidFill>
@@ -4168,7 +4168,7 @@
             </a:ln>
             <a:extLst>
               <a:ext uri="{91240B29-F687-4f45-9708-019B960494DF}">
-                <a14:hiddenLine xmlns:a14="http://schemas.microsoft.com/office/drawing/2010/main" xmlns="" w="9525">
+                <a14:hiddenLine xmlns="" xmlns:a14="http://schemas.microsoft.com/office/drawing/2010/main" w="9525">
                   <a:solidFill>
                     <a:srgbClr val="000000"/>
                   </a:solidFill>
@@ -4258,7 +4258,7 @@
             </a:ln>
             <a:extLst>
               <a:ext uri="{91240B29-F687-4f45-9708-019B960494DF}">
-                <a14:hiddenLine xmlns:a14="http://schemas.microsoft.com/office/drawing/2010/main" xmlns="" w="9525">
+                <a14:hiddenLine xmlns="" xmlns:a14="http://schemas.microsoft.com/office/drawing/2010/main" w="9525">
                   <a:solidFill>
                     <a:srgbClr val="000000"/>
                   </a:solidFill>
@@ -4396,7 +4396,7 @@
           <a:p>
             <a:fld id="{48A87A34-81AB-432B-8DAE-1953F412C126}" type="datetimeFigureOut">
               <a:rPr lang="en-US" dirty="0"/>
-              <a:t>6/10/2025</a:t>
+              <a:t>6/25/2025</a:t>
             </a:fld>
             <a:endParaRPr lang="en-US" dirty="0"/>
           </a:p>
@@ -4656,7 +4656,7 @@
           <a:p>
             <a:fld id="{48A87A34-81AB-432B-8DAE-1953F412C126}" type="datetimeFigureOut">
               <a:rPr lang="en-US" dirty="0"/>
-              <a:t>6/10/2025</a:t>
+              <a:t>6/25/2025</a:t>
             </a:fld>
             <a:endParaRPr lang="en-US" dirty="0"/>
           </a:p>
@@ -4846,7 +4846,7 @@
           <a:p>
             <a:fld id="{48A87A34-81AB-432B-8DAE-1953F412C126}" type="datetimeFigureOut">
               <a:rPr lang="en-US" dirty="0"/>
-              <a:t>6/10/2025</a:t>
+              <a:t>6/25/2025</a:t>
             </a:fld>
             <a:endParaRPr lang="en-US" dirty="0"/>
           </a:p>
@@ -5103,7 +5103,7 @@
           <a:p>
             <a:fld id="{48A87A34-81AB-432B-8DAE-1953F412C126}" type="datetimeFigureOut">
               <a:rPr lang="en-US" dirty="0"/>
-              <a:t>6/10/2025</a:t>
+              <a:t>6/25/2025</a:t>
             </a:fld>
             <a:endParaRPr lang="en-US" dirty="0"/>
           </a:p>
@@ -5531,7 +5531,7 @@
           <a:p>
             <a:fld id="{48A87A34-81AB-432B-8DAE-1953F412C126}" type="datetimeFigureOut">
               <a:rPr lang="en-US" dirty="0"/>
-              <a:t>6/10/2025</a:t>
+              <a:t>6/25/2025</a:t>
             </a:fld>
             <a:endParaRPr lang="en-US" dirty="0"/>
           </a:p>
@@ -6071,7 +6071,7 @@
           <a:p>
             <a:fld id="{48A87A34-81AB-432B-8DAE-1953F412C126}" type="datetimeFigureOut">
               <a:rPr lang="en-US" dirty="0"/>
-              <a:t>6/10/2025</a:t>
+              <a:t>6/25/2025</a:t>
             </a:fld>
             <a:endParaRPr lang="en-US" dirty="0"/>
           </a:p>
@@ -6782,7 +6782,7 @@
           <a:p>
             <a:fld id="{48A87A34-81AB-432B-8DAE-1953F412C126}" type="datetimeFigureOut">
               <a:rPr lang="en-US" dirty="0"/>
-              <a:t>6/10/2025</a:t>
+              <a:t>6/25/2025</a:t>
             </a:fld>
             <a:endParaRPr lang="en-US" dirty="0"/>
           </a:p>
@@ -6945,7 +6945,7 @@
           <a:p>
             <a:fld id="{48A87A34-81AB-432B-8DAE-1953F412C126}" type="datetimeFigureOut">
               <a:rPr lang="en-US" dirty="0"/>
-              <a:t>6/10/2025</a:t>
+              <a:t>6/25/2025</a:t>
             </a:fld>
             <a:endParaRPr lang="en-US" dirty="0"/>
           </a:p>
@@ -7118,7 +7118,7 @@
           <a:p>
             <a:fld id="{48A87A34-81AB-432B-8DAE-1953F412C126}" type="datetimeFigureOut">
               <a:rPr lang="en-US" dirty="0"/>
-              <a:t>6/10/2025</a:t>
+              <a:t>6/25/2025</a:t>
             </a:fld>
             <a:endParaRPr lang="en-US" dirty="0"/>
           </a:p>
@@ -7281,7 +7281,7 @@
           <a:p>
             <a:fld id="{48A87A34-81AB-432B-8DAE-1953F412C126}" type="datetimeFigureOut">
               <a:rPr lang="en-US" dirty="0"/>
-              <a:t>6/10/2025</a:t>
+              <a:t>6/25/2025</a:t>
             </a:fld>
             <a:endParaRPr lang="en-US" dirty="0"/>
           </a:p>
@@ -7525,7 +7525,7 @@
           <a:p>
             <a:fld id="{48A87A34-81AB-432B-8DAE-1953F412C126}" type="datetimeFigureOut">
               <a:rPr lang="en-US" dirty="0"/>
-              <a:t>6/10/2025</a:t>
+              <a:t>6/25/2025</a:t>
             </a:fld>
             <a:endParaRPr lang="en-US" dirty="0"/>
           </a:p>
@@ -7749,7 +7749,7 @@
           <a:p>
             <a:fld id="{48A87A34-81AB-432B-8DAE-1953F412C126}" type="datetimeFigureOut">
               <a:rPr lang="en-US" dirty="0"/>
-              <a:t>6/10/2025</a:t>
+              <a:t>6/25/2025</a:t>
             </a:fld>
             <a:endParaRPr lang="en-US" dirty="0"/>
           </a:p>
@@ -8122,7 +8122,7 @@
           <a:p>
             <a:fld id="{48A87A34-81AB-432B-8DAE-1953F412C126}" type="datetimeFigureOut">
               <a:rPr lang="en-US" dirty="0"/>
-              <a:t>6/10/2025</a:t>
+              <a:t>6/25/2025</a:t>
             </a:fld>
             <a:endParaRPr lang="en-US" dirty="0"/>
           </a:p>
@@ -8234,7 +8234,7 @@
           <a:p>
             <a:fld id="{48A87A34-81AB-432B-8DAE-1953F412C126}" type="datetimeFigureOut">
               <a:rPr lang="en-US" dirty="0"/>
-              <a:t>6/10/2025</a:t>
+              <a:t>6/25/2025</a:t>
             </a:fld>
             <a:endParaRPr lang="en-US" dirty="0"/>
           </a:p>
@@ -8324,7 +8324,7 @@
           <a:p>
             <a:fld id="{48A87A34-81AB-432B-8DAE-1953F412C126}" type="datetimeFigureOut">
               <a:rPr lang="en-US" dirty="0"/>
-              <a:t>6/10/2025</a:t>
+              <a:t>6/25/2025</a:t>
             </a:fld>
             <a:endParaRPr lang="en-US" dirty="0"/>
           </a:p>
@@ -8566,7 +8566,7 @@
           <a:p>
             <a:fld id="{48A87A34-81AB-432B-8DAE-1953F412C126}" type="datetimeFigureOut">
               <a:rPr lang="en-US" dirty="0"/>
-              <a:t>6/10/2025</a:t>
+              <a:t>6/25/2025</a:t>
             </a:fld>
             <a:endParaRPr lang="en-US" dirty="0"/>
           </a:p>
@@ -8839,7 +8839,7 @@
           <a:p>
             <a:fld id="{48A87A34-81AB-432B-8DAE-1953F412C126}" type="datetimeFigureOut">
               <a:rPr lang="en-US" dirty="0"/>
-              <a:t>6/10/2025</a:t>
+              <a:t>6/25/2025</a:t>
             </a:fld>
             <a:endParaRPr lang="en-US" dirty="0"/>
           </a:p>
@@ -8950,7 +8950,7 @@
           <a:noFill/>
           <a:extLst>
             <a:ext uri="{909E8E84-426E-40dd-AFC4-6F175D3DCCD1}">
-              <a14:hiddenFill xmlns:a14="http://schemas.microsoft.com/office/drawing/2010/main" xmlns="">
+              <a14:hiddenFill xmlns="" xmlns:a14="http://schemas.microsoft.com/office/drawing/2010/main">
                 <a:solidFill>
                   <a:srgbClr val="FFFFFF"/>
                 </a:solidFill>
@@ -9024,7 +9024,7 @@
               </a:ln>
               <a:extLst>
                 <a:ext uri="{91240B29-F687-4f45-9708-019B960494DF}">
-                  <a14:hiddenLine xmlns:a14="http://schemas.microsoft.com/office/drawing/2010/main" xmlns="" w="9525">
+                  <a14:hiddenLine xmlns="" xmlns:a14="http://schemas.microsoft.com/office/drawing/2010/main" w="9525">
                     <a:solidFill>
                       <a:srgbClr val="000000"/>
                     </a:solidFill>
@@ -9114,7 +9114,7 @@
               </a:ln>
               <a:extLst>
                 <a:ext uri="{91240B29-F687-4f45-9708-019B960494DF}">
-                  <a14:hiddenLine xmlns:a14="http://schemas.microsoft.com/office/drawing/2010/main" xmlns="" w="9525">
+                  <a14:hiddenLine xmlns="" xmlns:a14="http://schemas.microsoft.com/office/drawing/2010/main" w="9525">
                     <a:solidFill>
                       <a:srgbClr val="000000"/>
                     </a:solidFill>
@@ -9204,7 +9204,7 @@
               </a:ln>
               <a:extLst>
                 <a:ext uri="{91240B29-F687-4f45-9708-019B960494DF}">
-                  <a14:hiddenLine xmlns:a14="http://schemas.microsoft.com/office/drawing/2010/main" xmlns="" w="9525">
+                  <a14:hiddenLine xmlns="" xmlns:a14="http://schemas.microsoft.com/office/drawing/2010/main" w="9525">
                     <a:solidFill>
                       <a:srgbClr val="000000"/>
                     </a:solidFill>
@@ -9266,7 +9266,7 @@
               </a:ln>
               <a:extLst>
                 <a:ext uri="{91240B29-F687-4f45-9708-019B960494DF}">
-                  <a14:hiddenLine xmlns:a14="http://schemas.microsoft.com/office/drawing/2010/main" xmlns="" w="9525">
+                  <a14:hiddenLine xmlns="" xmlns:a14="http://schemas.microsoft.com/office/drawing/2010/main" w="9525">
                     <a:solidFill>
                       <a:srgbClr val="000000"/>
                     </a:solidFill>
@@ -9356,7 +9356,7 @@
               </a:ln>
               <a:extLst>
                 <a:ext uri="{91240B29-F687-4f45-9708-019B960494DF}">
-                  <a14:hiddenLine xmlns:a14="http://schemas.microsoft.com/office/drawing/2010/main" xmlns="" w="9525">
+                  <a14:hiddenLine xmlns="" xmlns:a14="http://schemas.microsoft.com/office/drawing/2010/main" w="9525">
                     <a:solidFill>
                       <a:srgbClr val="000000"/>
                     </a:solidFill>
@@ -9418,7 +9418,7 @@
               </a:ln>
               <a:extLst>
                 <a:ext uri="{91240B29-F687-4f45-9708-019B960494DF}">
-                  <a14:hiddenLine xmlns:a14="http://schemas.microsoft.com/office/drawing/2010/main" xmlns="" w="9525">
+                  <a14:hiddenLine xmlns="" xmlns:a14="http://schemas.microsoft.com/office/drawing/2010/main" w="9525">
                     <a:solidFill>
                       <a:srgbClr val="000000"/>
                     </a:solidFill>
@@ -9480,7 +9480,7 @@
               </a:ln>
               <a:extLst>
                 <a:ext uri="{91240B29-F687-4f45-9708-019B960494DF}">
-                  <a14:hiddenLine xmlns:a14="http://schemas.microsoft.com/office/drawing/2010/main" xmlns="" w="9525">
+                  <a14:hiddenLine xmlns="" xmlns:a14="http://schemas.microsoft.com/office/drawing/2010/main" w="9525">
                     <a:solidFill>
                       <a:srgbClr val="000000"/>
                     </a:solidFill>
@@ -9570,7 +9570,7 @@
               </a:ln>
               <a:extLst>
                 <a:ext uri="{91240B29-F687-4f45-9708-019B960494DF}">
-                  <a14:hiddenLine xmlns:a14="http://schemas.microsoft.com/office/drawing/2010/main" xmlns="" w="9525">
+                  <a14:hiddenLine xmlns="" xmlns:a14="http://schemas.microsoft.com/office/drawing/2010/main" w="9525">
                     <a:solidFill>
                       <a:srgbClr val="000000"/>
                     </a:solidFill>
@@ -9660,7 +9660,7 @@
               </a:ln>
               <a:extLst>
                 <a:ext uri="{91240B29-F687-4f45-9708-019B960494DF}">
-                  <a14:hiddenLine xmlns:a14="http://schemas.microsoft.com/office/drawing/2010/main" xmlns="" w="9525">
+                  <a14:hiddenLine xmlns="" xmlns:a14="http://schemas.microsoft.com/office/drawing/2010/main" w="9525">
                     <a:solidFill>
                       <a:srgbClr val="000000"/>
                     </a:solidFill>
@@ -9722,7 +9722,7 @@
               </a:ln>
               <a:extLst>
                 <a:ext uri="{91240B29-F687-4f45-9708-019B960494DF}">
-                  <a14:hiddenLine xmlns:a14="http://schemas.microsoft.com/office/drawing/2010/main" xmlns="" w="9525">
+                  <a14:hiddenLine xmlns="" xmlns:a14="http://schemas.microsoft.com/office/drawing/2010/main" w="9525">
                     <a:solidFill>
                       <a:srgbClr val="000000"/>
                     </a:solidFill>
@@ -9832,7 +9832,7 @@
               </a:ln>
               <a:extLst>
                 <a:ext uri="{91240B29-F687-4f45-9708-019B960494DF}">
-                  <a14:hiddenLine xmlns:a14="http://schemas.microsoft.com/office/drawing/2010/main" xmlns="" w="9525">
+                  <a14:hiddenLine xmlns="" xmlns:a14="http://schemas.microsoft.com/office/drawing/2010/main" w="9525">
                     <a:solidFill>
                       <a:srgbClr val="000000"/>
                     </a:solidFill>
@@ -9916,7 +9916,7 @@
               </a:ln>
               <a:extLst>
                 <a:ext uri="{91240B29-F687-4f45-9708-019B960494DF}">
-                  <a14:hiddenLine xmlns:a14="http://schemas.microsoft.com/office/drawing/2010/main" xmlns="" w="9525">
+                  <a14:hiddenLine xmlns="" xmlns:a14="http://schemas.microsoft.com/office/drawing/2010/main" w="9525">
                     <a:solidFill>
                       <a:srgbClr val="000000"/>
                     </a:solidFill>
@@ -9978,7 +9978,7 @@
               </a:ln>
               <a:extLst>
                 <a:ext uri="{91240B29-F687-4f45-9708-019B960494DF}">
-                  <a14:hiddenLine xmlns:a14="http://schemas.microsoft.com/office/drawing/2010/main" xmlns="" w="9525">
+                  <a14:hiddenLine xmlns="" xmlns:a14="http://schemas.microsoft.com/office/drawing/2010/main" w="9525">
                     <a:solidFill>
                       <a:srgbClr val="000000"/>
                     </a:solidFill>
@@ -10040,7 +10040,7 @@
               </a:ln>
               <a:extLst>
                 <a:ext uri="{91240B29-F687-4f45-9708-019B960494DF}">
-                  <a14:hiddenLine xmlns:a14="http://schemas.microsoft.com/office/drawing/2010/main" xmlns="" w="9525">
+                  <a14:hiddenLine xmlns="" xmlns:a14="http://schemas.microsoft.com/office/drawing/2010/main" w="9525">
                     <a:solidFill>
                       <a:srgbClr val="000000"/>
                     </a:solidFill>
@@ -10130,7 +10130,7 @@
               </a:ln>
               <a:extLst>
                 <a:ext uri="{91240B29-F687-4f45-9708-019B960494DF}">
-                  <a14:hiddenLine xmlns:a14="http://schemas.microsoft.com/office/drawing/2010/main" xmlns="" w="9525">
+                  <a14:hiddenLine xmlns="" xmlns:a14="http://schemas.microsoft.com/office/drawing/2010/main" w="9525">
                     <a:solidFill>
                       <a:srgbClr val="000000"/>
                     </a:solidFill>
@@ -10164,7 +10164,7 @@
               </a:ln>
               <a:extLst>
                 <a:ext uri="{91240B29-F687-4f45-9708-019B960494DF}">
-                  <a14:hiddenLine xmlns:a14="http://schemas.microsoft.com/office/drawing/2010/main" xmlns="" w="9525">
+                  <a14:hiddenLine xmlns="" xmlns:a14="http://schemas.microsoft.com/office/drawing/2010/main" w="9525">
                     <a:solidFill>
                       <a:srgbClr val="000000"/>
                     </a:solidFill>
@@ -10229,7 +10229,7 @@
               </a:ln>
               <a:extLst>
                 <a:ext uri="{91240B29-F687-4f45-9708-019B960494DF}">
-                  <a14:hiddenLine xmlns:a14="http://schemas.microsoft.com/office/drawing/2010/main" xmlns="" w="9525">
+                  <a14:hiddenLine xmlns="" xmlns:a14="http://schemas.microsoft.com/office/drawing/2010/main" w="9525">
                     <a:solidFill>
                       <a:srgbClr val="000000"/>
                     </a:solidFill>
@@ -10319,7 +10319,7 @@
               </a:ln>
               <a:extLst>
                 <a:ext uri="{91240B29-F687-4f45-9708-019B960494DF}">
-                  <a14:hiddenLine xmlns:a14="http://schemas.microsoft.com/office/drawing/2010/main" xmlns="" w="9525">
+                  <a14:hiddenLine xmlns="" xmlns:a14="http://schemas.microsoft.com/office/drawing/2010/main" w="9525">
                     <a:solidFill>
                       <a:srgbClr val="000000"/>
                     </a:solidFill>
@@ -10381,7 +10381,7 @@
               </a:ln>
               <a:extLst>
                 <a:ext uri="{91240B29-F687-4f45-9708-019B960494DF}">
-                  <a14:hiddenLine xmlns:a14="http://schemas.microsoft.com/office/drawing/2010/main" xmlns="" w="9525">
+                  <a14:hiddenLine xmlns="" xmlns:a14="http://schemas.microsoft.com/office/drawing/2010/main" w="9525">
                     <a:solidFill>
                       <a:srgbClr val="000000"/>
                     </a:solidFill>
@@ -10471,7 +10471,7 @@
               </a:ln>
               <a:extLst>
                 <a:ext uri="{91240B29-F687-4f45-9708-019B960494DF}">
-                  <a14:hiddenLine xmlns:a14="http://schemas.microsoft.com/office/drawing/2010/main" xmlns="" w="9525">
+                  <a14:hiddenLine xmlns="" xmlns:a14="http://schemas.microsoft.com/office/drawing/2010/main" w="9525">
                     <a:solidFill>
                       <a:srgbClr val="000000"/>
                     </a:solidFill>
@@ -10536,7 +10536,7 @@
               </a:ln>
               <a:extLst>
                 <a:ext uri="{91240B29-F687-4f45-9708-019B960494DF}">
-                  <a14:hiddenLine xmlns:a14="http://schemas.microsoft.com/office/drawing/2010/main" xmlns="" w="9525">
+                  <a14:hiddenLine xmlns="" xmlns:a14="http://schemas.microsoft.com/office/drawing/2010/main" w="9525">
                     <a:solidFill>
                       <a:srgbClr val="000000"/>
                     </a:solidFill>
@@ -10598,7 +10598,7 @@
               </a:ln>
               <a:extLst>
                 <a:ext uri="{91240B29-F687-4f45-9708-019B960494DF}">
-                  <a14:hiddenLine xmlns:a14="http://schemas.microsoft.com/office/drawing/2010/main" xmlns="" w="9525">
+                  <a14:hiddenLine xmlns="" xmlns:a14="http://schemas.microsoft.com/office/drawing/2010/main" w="9525">
                     <a:solidFill>
                       <a:srgbClr val="000000"/>
                     </a:solidFill>
@@ -10688,7 +10688,7 @@
               </a:ln>
               <a:extLst>
                 <a:ext uri="{91240B29-F687-4f45-9708-019B960494DF}">
-                  <a14:hiddenLine xmlns:a14="http://schemas.microsoft.com/office/drawing/2010/main" xmlns="" w="9525">
+                  <a14:hiddenLine xmlns="" xmlns:a14="http://schemas.microsoft.com/office/drawing/2010/main" w="9525">
                     <a:solidFill>
                       <a:srgbClr val="000000"/>
                     </a:solidFill>
@@ -10778,7 +10778,7 @@
               </a:ln>
               <a:extLst>
                 <a:ext uri="{91240B29-F687-4f45-9708-019B960494DF}">
-                  <a14:hiddenLine xmlns:a14="http://schemas.microsoft.com/office/drawing/2010/main" xmlns="" w="9525">
+                  <a14:hiddenLine xmlns="" xmlns:a14="http://schemas.microsoft.com/office/drawing/2010/main" w="9525">
                     <a:solidFill>
                       <a:srgbClr val="000000"/>
                     </a:solidFill>
@@ -10843,7 +10843,7 @@
               </a:ln>
               <a:extLst>
                 <a:ext uri="{91240B29-F687-4f45-9708-019B960494DF}">
-                  <a14:hiddenLine xmlns:a14="http://schemas.microsoft.com/office/drawing/2010/main" xmlns="" w="9525">
+                  <a14:hiddenLine xmlns="" xmlns:a14="http://schemas.microsoft.com/office/drawing/2010/main" w="9525">
                     <a:solidFill>
                       <a:srgbClr val="000000"/>
                     </a:solidFill>
@@ -10963,7 +10963,7 @@
               </a:ln>
               <a:extLst>
                 <a:ext uri="{91240B29-F687-4f45-9708-019B960494DF}">
-                  <a14:hiddenLine xmlns:a14="http://schemas.microsoft.com/office/drawing/2010/main" xmlns="" w="9525">
+                  <a14:hiddenLine xmlns="" xmlns:a14="http://schemas.microsoft.com/office/drawing/2010/main" w="9525">
                     <a:solidFill>
                       <a:srgbClr val="000000"/>
                     </a:solidFill>
@@ -11061,7 +11061,7 @@
               </a:ln>
               <a:extLst>
                 <a:ext uri="{91240B29-F687-4f45-9708-019B960494DF}">
-                  <a14:hiddenLine xmlns:a14="http://schemas.microsoft.com/office/drawing/2010/main" xmlns="" w="9525">
+                  <a14:hiddenLine xmlns="" xmlns:a14="http://schemas.microsoft.com/office/drawing/2010/main" w="9525">
                     <a:solidFill>
                       <a:srgbClr val="000000"/>
                     </a:solidFill>
@@ -11176,7 +11176,7 @@
               </a:ln>
               <a:extLst>
                 <a:ext uri="{91240B29-F687-4f45-9708-019B960494DF}">
-                  <a14:hiddenLine xmlns:a14="http://schemas.microsoft.com/office/drawing/2010/main" xmlns="" w="9525">
+                  <a14:hiddenLine xmlns="" xmlns:a14="http://schemas.microsoft.com/office/drawing/2010/main" w="9525">
                     <a:solidFill>
                       <a:srgbClr val="000000"/>
                     </a:solidFill>
@@ -11266,7 +11266,7 @@
               </a:ln>
               <a:extLst>
                 <a:ext uri="{91240B29-F687-4f45-9708-019B960494DF}">
-                  <a14:hiddenLine xmlns:a14="http://schemas.microsoft.com/office/drawing/2010/main" xmlns="" w="9525">
+                  <a14:hiddenLine xmlns="" xmlns:a14="http://schemas.microsoft.com/office/drawing/2010/main" w="9525">
                     <a:solidFill>
                       <a:srgbClr val="000000"/>
                     </a:solidFill>
@@ -11331,7 +11331,7 @@
               </a:ln>
               <a:extLst>
                 <a:ext uri="{91240B29-F687-4f45-9708-019B960494DF}">
-                  <a14:hiddenLine xmlns:a14="http://schemas.microsoft.com/office/drawing/2010/main" xmlns="" w="9525">
+                  <a14:hiddenLine xmlns="" xmlns:a14="http://schemas.microsoft.com/office/drawing/2010/main" w="9525">
                     <a:solidFill>
                       <a:srgbClr val="000000"/>
                     </a:solidFill>
@@ -11421,7 +11421,7 @@
               </a:ln>
               <a:extLst>
                 <a:ext uri="{91240B29-F687-4f45-9708-019B960494DF}">
-                  <a14:hiddenLine xmlns:a14="http://schemas.microsoft.com/office/drawing/2010/main" xmlns="" w="9525">
+                  <a14:hiddenLine xmlns="" xmlns:a14="http://schemas.microsoft.com/office/drawing/2010/main" w="9525">
                     <a:solidFill>
                       <a:srgbClr val="000000"/>
                     </a:solidFill>
@@ -11489,7 +11489,7 @@
               </a:ln>
               <a:extLst>
                 <a:ext uri="{91240B29-F687-4f45-9708-019B960494DF}">
-                  <a14:hiddenLine xmlns:a14="http://schemas.microsoft.com/office/drawing/2010/main" xmlns="" w="9525">
+                  <a14:hiddenLine xmlns="" xmlns:a14="http://schemas.microsoft.com/office/drawing/2010/main" w="9525">
                     <a:solidFill>
                       <a:srgbClr val="000000"/>
                     </a:solidFill>
@@ -11579,7 +11579,7 @@
               </a:ln>
               <a:extLst>
                 <a:ext uri="{91240B29-F687-4f45-9708-019B960494DF}">
-                  <a14:hiddenLine xmlns:a14="http://schemas.microsoft.com/office/drawing/2010/main" xmlns="" w="9525">
+                  <a14:hiddenLine xmlns="" xmlns:a14="http://schemas.microsoft.com/office/drawing/2010/main" w="9525">
                     <a:solidFill>
                       <a:srgbClr val="000000"/>
                     </a:solidFill>
@@ -11647,7 +11647,7 @@
               </a:ln>
               <a:extLst>
                 <a:ext uri="{91240B29-F687-4f45-9708-019B960494DF}">
-                  <a14:hiddenLine xmlns:a14="http://schemas.microsoft.com/office/drawing/2010/main" xmlns="" w="9525">
+                  <a14:hiddenLine xmlns="" xmlns:a14="http://schemas.microsoft.com/office/drawing/2010/main" w="9525">
                     <a:solidFill>
                       <a:srgbClr val="000000"/>
                     </a:solidFill>
@@ -11737,7 +11737,7 @@
               </a:ln>
               <a:extLst>
                 <a:ext uri="{91240B29-F687-4f45-9708-019B960494DF}">
-                  <a14:hiddenLine xmlns:a14="http://schemas.microsoft.com/office/drawing/2010/main" xmlns="" w="9525">
+                  <a14:hiddenLine xmlns="" xmlns:a14="http://schemas.microsoft.com/office/drawing/2010/main" w="9525">
                     <a:solidFill>
                       <a:srgbClr val="000000"/>
                     </a:solidFill>
@@ -11771,7 +11771,7 @@
               </a:ln>
               <a:extLst>
                 <a:ext uri="{91240B29-F687-4f45-9708-019B960494DF}">
-                  <a14:hiddenLine xmlns:a14="http://schemas.microsoft.com/office/drawing/2010/main" xmlns="" w="9525">
+                  <a14:hiddenLine xmlns="" xmlns:a14="http://schemas.microsoft.com/office/drawing/2010/main" w="9525">
                     <a:solidFill>
                       <a:srgbClr val="000000"/>
                     </a:solidFill>
@@ -11911,7 +11911,7 @@
             <a:fld id="{48A87A34-81AB-432B-8DAE-1953F412C126}" type="datetimeFigureOut">
               <a:rPr lang="en-US" dirty="0"/>
               <a:pPr/>
-              <a:t>6/10/2025</a:t>
+              <a:t>6/25/2025</a:t>
             </a:fld>
             <a:endParaRPr lang="en-US" dirty="0"/>
           </a:p>
@@ -12571,6 +12571,179 @@
           <p:cNvPr id="2" name="Title 1">
             <a:extLst>
               <a:ext uri="{FF2B5EF4-FFF2-40B4-BE49-F238E27FC236}">
+                <a16:creationId xmlns:a16="http://schemas.microsoft.com/office/drawing/2014/main" id="{89BC487E-F833-124C-6E11-CE5A778CC07A}"/>
+              </a:ext>
+            </a:extLst>
+          </p:cNvPr>
+          <p:cNvSpPr>
+            <a:spLocks noGrp="1"/>
+          </p:cNvSpPr>
+          <p:nvPr>
+            <p:ph type="title"/>
+          </p:nvPr>
+        </p:nvSpPr>
+        <p:spPr/>
+        <p:txBody>
+          <a:bodyPr/>
+          <a:lstStyle/>
+          <a:p>
+            <a:r>
+              <a:rPr lang="en-US" dirty="0"/>
+              <a:t>PerSon-2</a:t>
+            </a:r>
+            <a:br>
+              <a:rPr lang="en-US" dirty="0"/>
+            </a:br>
+            <a:r>
+              <a:rPr lang="en-US" dirty="0"/>
+              <a:t>Feedback</a:t>
+            </a:r>
+          </a:p>
+        </p:txBody>
+      </p:sp>
+      <p:sp>
+        <p:nvSpPr>
+          <p:cNvPr id="3" name="Content Placeholder 2">
+            <a:extLst>
+              <a:ext uri="{FF2B5EF4-FFF2-40B4-BE49-F238E27FC236}">
+                <a16:creationId xmlns:a16="http://schemas.microsoft.com/office/drawing/2014/main" id="{DCC67ACE-5ED9-9422-E30F-523B01D84522}"/>
+              </a:ext>
+            </a:extLst>
+          </p:cNvPr>
+          <p:cNvSpPr>
+            <a:spLocks noGrp="1"/>
+          </p:cNvSpPr>
+          <p:nvPr>
+            <p:ph idx="1"/>
+          </p:nvPr>
+        </p:nvSpPr>
+        <p:spPr/>
+        <p:txBody>
+          <a:bodyPr>
+            <a:normAutofit fontScale="92500" lnSpcReduction="10000"/>
+          </a:bodyPr>
+          <a:lstStyle/>
+          <a:p>
+            <a:pPr marL="457200" indent="-457200">
+              <a:buFont typeface="+mj-lt"/>
+              <a:buAutoNum type="arabicPeriod"/>
+            </a:pPr>
+            <a:r>
+              <a:rPr lang="en-US" dirty="0"/>
+              <a:t>Maintains a terrace gardening.</a:t>
+            </a:r>
+          </a:p>
+          <a:p>
+            <a:pPr marL="457200" indent="-457200">
+              <a:buFont typeface="+mj-lt"/>
+              <a:buAutoNum type="arabicPeriod"/>
+            </a:pPr>
+            <a:r>
+              <a:rPr lang="en-US" dirty="0"/>
+              <a:t>Depends upon the weather twice a week.</a:t>
+            </a:r>
+          </a:p>
+          <a:p>
+            <a:pPr marL="457200" indent="-457200">
+              <a:buFont typeface="+mj-lt"/>
+              <a:buAutoNum type="arabicPeriod"/>
+            </a:pPr>
+            <a:r>
+              <a:rPr lang="en-US" dirty="0"/>
+              <a:t>Usually water the plants in the late afternoon.</a:t>
+            </a:r>
+          </a:p>
+          <a:p>
+            <a:pPr marL="457200" indent="-457200">
+              <a:buFont typeface="+mj-lt"/>
+              <a:buAutoNum type="arabicPeriod"/>
+            </a:pPr>
+            <a:r>
+              <a:rPr lang="en-US" dirty="0"/>
+              <a:t>Quarter liter of water to small plants.</a:t>
+            </a:r>
+          </a:p>
+          <a:p>
+            <a:pPr marL="457200" indent="-457200">
+              <a:buFont typeface="+mj-lt"/>
+              <a:buAutoNum type="arabicPeriod"/>
+            </a:pPr>
+            <a:r>
+              <a:rPr lang="en-US" dirty="0"/>
+              <a:t>Normal process.</a:t>
+            </a:r>
+          </a:p>
+          <a:p>
+            <a:pPr marL="457200" indent="-457200">
+              <a:buFont typeface="+mj-lt"/>
+              <a:buAutoNum type="arabicPeriod"/>
+            </a:pPr>
+            <a:r>
+              <a:rPr lang="en-US" dirty="0"/>
+              <a:t>Based upon the plants appearance and soil conditions.</a:t>
+            </a:r>
+          </a:p>
+          <a:p>
+            <a:pPr marL="457200" indent="-457200">
+              <a:buFont typeface="+mj-lt"/>
+              <a:buAutoNum type="arabicPeriod"/>
+            </a:pPr>
+            <a:r>
+              <a:rPr lang="en-US" dirty="0"/>
+              <a:t>Faced challenges With </a:t>
+            </a:r>
+            <a:r>
+              <a:rPr lang="en-US" dirty="0" err="1"/>
+              <a:t>underwatering</a:t>
+            </a:r>
+            <a:r>
+              <a:rPr lang="en-US" dirty="0"/>
+              <a:t> during summer season.</a:t>
+            </a:r>
+          </a:p>
+          <a:p>
+            <a:pPr marL="0" indent="0">
+              <a:buNone/>
+            </a:pPr>
+            <a:endParaRPr lang="en-US" dirty="0"/>
+          </a:p>
+        </p:txBody>
+      </p:sp>
+    </p:spTree>
+    <p:extLst>
+      <p:ext uri="{BB962C8B-B14F-4D97-AF65-F5344CB8AC3E}">
+        <p14:creationId xmlns:p14="http://schemas.microsoft.com/office/powerpoint/2010/main" val="1821022523"/>
+      </p:ext>
+    </p:extLst>
+  </p:cSld>
+  <p:clrMapOvr>
+    <a:masterClrMapping/>
+  </p:clrMapOvr>
+</p:sld>
+</file>
+
+<file path=ppt/slides/slide11.xml><?xml version="1.0" encoding="utf-8"?>
+<p:sld xmlns:a="http://schemas.openxmlformats.org/drawingml/2006/main" xmlns:r="http://schemas.openxmlformats.org/officeDocument/2006/relationships" xmlns:p="http://schemas.openxmlformats.org/presentationml/2006/main">
+  <p:cSld>
+    <p:spTree>
+      <p:nvGrpSpPr>
+        <p:cNvPr id="1" name=""/>
+        <p:cNvGrpSpPr/>
+        <p:nvPr/>
+      </p:nvGrpSpPr>
+      <p:grpSpPr>
+        <a:xfrm>
+          <a:off x="0" y="0"/>
+          <a:ext cx="0" cy="0"/>
+          <a:chOff x="0" y="0"/>
+          <a:chExt cx="0" cy="0"/>
+        </a:xfrm>
+      </p:grpSpPr>
+      <p:sp>
+        <p:nvSpPr>
+          <p:cNvPr id="2" name="Title 1">
+            <a:extLst>
+              <a:ext uri="{FF2B5EF4-FFF2-40B4-BE49-F238E27FC236}">
                 <a16:creationId xmlns:a16="http://schemas.microsoft.com/office/drawing/2014/main" id="{2B28BB1D-57F8-8547-2E42-D7B49CB89052}"/>
               </a:ext>
             </a:extLst>
@@ -12794,7 +12967,7 @@
 </p:sld>
 </file>
 
-<file path=ppt/slides/slide11.xml><?xml version="1.0" encoding="utf-8"?>
+<file path=ppt/slides/slide12.xml><?xml version="1.0" encoding="utf-8"?>
 <p:sld xmlns:a="http://schemas.openxmlformats.org/drawingml/2006/main" xmlns:r="http://schemas.openxmlformats.org/officeDocument/2006/relationships" xmlns:p="http://schemas.openxmlformats.org/presentationml/2006/main">
   <p:cSld>
     <p:spTree>
@@ -12877,98 +13050,6 @@
     <p:extLst>
       <p:ext uri="{BB962C8B-B14F-4D97-AF65-F5344CB8AC3E}">
         <p14:creationId xmlns:p14="http://schemas.microsoft.com/office/powerpoint/2010/main" val="216632474"/>
-      </p:ext>
-    </p:extLst>
-  </p:cSld>
-  <p:clrMapOvr>
-    <a:masterClrMapping/>
-  </p:clrMapOvr>
-</p:sld>
-</file>
-
-<file path=ppt/slides/slide12.xml><?xml version="1.0" encoding="utf-8"?>
-<p:sld xmlns:a="http://schemas.openxmlformats.org/drawingml/2006/main" xmlns:r="http://schemas.openxmlformats.org/officeDocument/2006/relationships" xmlns:p="http://schemas.openxmlformats.org/presentationml/2006/main">
-  <p:cSld>
-    <p:spTree>
-      <p:nvGrpSpPr>
-        <p:cNvPr id="1" name=""/>
-        <p:cNvGrpSpPr/>
-        <p:nvPr/>
-      </p:nvGrpSpPr>
-      <p:grpSpPr>
-        <a:xfrm>
-          <a:off x="0" y="0"/>
-          <a:ext cx="0" cy="0"/>
-          <a:chOff x="0" y="0"/>
-          <a:chExt cx="0" cy="0"/>
-        </a:xfrm>
-      </p:grpSpPr>
-      <p:sp>
-        <p:nvSpPr>
-          <p:cNvPr id="2" name="Title 1">
-            <a:extLst>
-              <a:ext uri="{FF2B5EF4-FFF2-40B4-BE49-F238E27FC236}">
-                <a16:creationId xmlns:a16="http://schemas.microsoft.com/office/drawing/2014/main" id="{BD4F9E5A-93BF-6F81-9092-4CD1E483B6E2}"/>
-              </a:ext>
-            </a:extLst>
-          </p:cNvPr>
-          <p:cNvSpPr>
-            <a:spLocks noGrp="1"/>
-          </p:cNvSpPr>
-          <p:nvPr>
-            <p:ph type="title"/>
-          </p:nvPr>
-        </p:nvSpPr>
-        <p:spPr/>
-        <p:txBody>
-          <a:bodyPr/>
-          <a:lstStyle/>
-          <a:p>
-            <a:r>
-              <a:rPr lang="en-US" dirty="0"/>
-              <a:t>                                 </a:t>
-            </a:r>
-            <a:r>
-              <a:rPr lang="en-US" dirty="0" err="1"/>
-              <a:t>ProTotype</a:t>
-            </a:r>
-            <a:endParaRPr lang="en-US" dirty="0"/>
-          </a:p>
-        </p:txBody>
-      </p:sp>
-      <p:pic>
-        <p:nvPicPr>
-          <p:cNvPr id="4" name="Content Placeholder 3">
-            <a:extLst>
-              <a:ext uri="{FF2B5EF4-FFF2-40B4-BE49-F238E27FC236}">
-                <a16:creationId xmlns:a16="http://schemas.microsoft.com/office/drawing/2014/main" id="{F3534D1F-7AEA-661D-22CA-1F8B13DA1224}"/>
-              </a:ext>
-            </a:extLst>
-          </p:cNvPr>
-          <p:cNvPicPr>
-            <a:picLocks noGrp="1" noChangeAspect="1"/>
-          </p:cNvPicPr>
-          <p:nvPr>
-            <p:ph idx="1"/>
-          </p:nvPr>
-        </p:nvPicPr>
-        <p:blipFill>
-          <a:blip r:embed="rId2"/>
-          <a:stretch>
-            <a:fillRect/>
-          </a:stretch>
-        </p:blipFill>
-        <p:spPr>
-          <a:xfrm>
-            <a:off x="2727155" y="2012756"/>
-            <a:ext cx="7192315" cy="4448401"/>
-          </a:xfrm>
-        </p:spPr>
-      </p:pic>
-    </p:spTree>
-    <p:extLst>
-      <p:ext uri="{BB962C8B-B14F-4D97-AF65-F5344CB8AC3E}">
-        <p14:creationId xmlns:p14="http://schemas.microsoft.com/office/powerpoint/2010/main" val="2775011067"/>
       </p:ext>
     </p:extLst>
   </p:cSld>
@@ -13746,8 +13827,8 @@
         </p:blipFill>
         <p:spPr>
           <a:xfrm>
-            <a:off x="504444" y="2381416"/>
-            <a:ext cx="4698415" cy="3409784"/>
+            <a:off x="457802" y="2382007"/>
+            <a:ext cx="4698415" cy="3726040"/>
           </a:xfrm>
           <a:prstGeom prst="rect">
             <a:avLst/>
@@ -13906,6 +13987,90 @@
           <p:cNvPr id="2" name="Title 1">
             <a:extLst>
               <a:ext uri="{FF2B5EF4-FFF2-40B4-BE49-F238E27FC236}">
+                <a16:creationId xmlns:a16="http://schemas.microsoft.com/office/drawing/2014/main" id="{7ADECC6A-505B-5AA1-58BE-8C10041B6087}"/>
+              </a:ext>
+            </a:extLst>
+          </p:cNvPr>
+          <p:cNvSpPr>
+            <a:spLocks noGrp="1"/>
+          </p:cNvSpPr>
+          <p:nvPr>
+            <p:ph type="title"/>
+          </p:nvPr>
+        </p:nvSpPr>
+        <p:spPr/>
+        <p:txBody>
+          <a:bodyPr/>
+          <a:lstStyle/>
+          <a:p>
+            <a:endParaRPr lang="en-US"/>
+          </a:p>
+        </p:txBody>
+      </p:sp>
+      <p:pic>
+        <p:nvPicPr>
+          <p:cNvPr id="4" name="Content Placeholder 3">
+            <a:extLst>
+              <a:ext uri="{FF2B5EF4-FFF2-40B4-BE49-F238E27FC236}">
+                <a16:creationId xmlns:a16="http://schemas.microsoft.com/office/drawing/2014/main" id="{7A7892A4-BBDC-8798-CC94-76361DCD1481}"/>
+              </a:ext>
+            </a:extLst>
+          </p:cNvPr>
+          <p:cNvPicPr>
+            <a:picLocks noGrp="1" noChangeAspect="1"/>
+          </p:cNvPicPr>
+          <p:nvPr>
+            <p:ph idx="1"/>
+          </p:nvPr>
+        </p:nvPicPr>
+        <p:blipFill>
+          <a:blip r:embed="rId2"/>
+          <a:stretch>
+            <a:fillRect/>
+          </a:stretch>
+        </p:blipFill>
+        <p:spPr>
+          <a:xfrm>
+            <a:off x="0" y="0"/>
+            <a:ext cx="11951051" cy="6858000"/>
+          </a:xfrm>
+        </p:spPr>
+      </p:pic>
+    </p:spTree>
+    <p:extLst>
+      <p:ext uri="{BB962C8B-B14F-4D97-AF65-F5344CB8AC3E}">
+        <p14:creationId xmlns:p14="http://schemas.microsoft.com/office/powerpoint/2010/main" val="1791422048"/>
+      </p:ext>
+    </p:extLst>
+  </p:cSld>
+  <p:clrMapOvr>
+    <a:masterClrMapping/>
+  </p:clrMapOvr>
+</p:sld>
+</file>
+
+<file path=ppt/slides/slide6.xml><?xml version="1.0" encoding="utf-8"?>
+<p:sld xmlns:a="http://schemas.openxmlformats.org/drawingml/2006/main" xmlns:r="http://schemas.openxmlformats.org/officeDocument/2006/relationships" xmlns:p="http://schemas.openxmlformats.org/presentationml/2006/main">
+  <p:cSld>
+    <p:spTree>
+      <p:nvGrpSpPr>
+        <p:cNvPr id="1" name=""/>
+        <p:cNvGrpSpPr/>
+        <p:nvPr/>
+      </p:nvGrpSpPr>
+      <p:grpSpPr>
+        <a:xfrm>
+          <a:off x="0" y="0"/>
+          <a:ext cx="0" cy="0"/>
+          <a:chOff x="0" y="0"/>
+          <a:chExt cx="0" cy="0"/>
+        </a:xfrm>
+      </p:grpSpPr>
+      <p:sp>
+        <p:nvSpPr>
+          <p:cNvPr id="2" name="Title 1">
+            <a:extLst>
+              <a:ext uri="{FF2B5EF4-FFF2-40B4-BE49-F238E27FC236}">
                 <a16:creationId xmlns:a16="http://schemas.microsoft.com/office/drawing/2014/main" id="{31C5C223-8867-A4AE-3EB7-377D0CF950E2}"/>
               </a:ext>
             </a:extLst>
@@ -14026,7 +14191,7 @@
 </p:sld>
 </file>
 
-<file path=ppt/slides/slide6.xml><?xml version="1.0" encoding="utf-8"?>
+<file path=ppt/slides/slide7.xml><?xml version="1.0" encoding="utf-8"?>
 <p:sld xmlns:a="http://schemas.openxmlformats.org/drawingml/2006/main" xmlns:r="http://schemas.openxmlformats.org/officeDocument/2006/relationships" xmlns:p="http://schemas.openxmlformats.org/presentationml/2006/main">
   <p:cSld>
     <p:spTree>
@@ -14110,7 +14275,7 @@
 </p:sld>
 </file>
 
-<file path=ppt/slides/slide7.xml><?xml version="1.0" encoding="utf-8"?>
+<file path=ppt/slides/slide8.xml><?xml version="1.0" encoding="utf-8"?>
 <p:sld xmlns:a="http://schemas.openxmlformats.org/drawingml/2006/main" xmlns:r="http://schemas.openxmlformats.org/officeDocument/2006/relationships" xmlns:p="http://schemas.openxmlformats.org/presentationml/2006/main">
   <p:cSld>
     <p:spTree>
@@ -14274,7 +14439,7 @@
 </p:sld>
 </file>
 
-<file path=ppt/slides/slide8.xml><?xml version="1.0" encoding="utf-8"?>
+<file path=ppt/slides/slide9.xml><?xml version="1.0" encoding="utf-8"?>
 <p:sld xmlns:a="http://schemas.openxmlformats.org/drawingml/2006/main" xmlns:r="http://schemas.openxmlformats.org/officeDocument/2006/relationships" xmlns:p="http://schemas.openxmlformats.org/presentationml/2006/main">
   <p:cSld>
     <p:spTree>
@@ -14430,179 +14595,6 @@
     <p:extLst>
       <p:ext uri="{BB962C8B-B14F-4D97-AF65-F5344CB8AC3E}">
         <p14:creationId xmlns:p14="http://schemas.microsoft.com/office/powerpoint/2010/main" val="69095893"/>
-      </p:ext>
-    </p:extLst>
-  </p:cSld>
-  <p:clrMapOvr>
-    <a:masterClrMapping/>
-  </p:clrMapOvr>
-</p:sld>
-</file>
-
-<file path=ppt/slides/slide9.xml><?xml version="1.0" encoding="utf-8"?>
-<p:sld xmlns:a="http://schemas.openxmlformats.org/drawingml/2006/main" xmlns:r="http://schemas.openxmlformats.org/officeDocument/2006/relationships" xmlns:p="http://schemas.openxmlformats.org/presentationml/2006/main">
-  <p:cSld>
-    <p:spTree>
-      <p:nvGrpSpPr>
-        <p:cNvPr id="1" name=""/>
-        <p:cNvGrpSpPr/>
-        <p:nvPr/>
-      </p:nvGrpSpPr>
-      <p:grpSpPr>
-        <a:xfrm>
-          <a:off x="0" y="0"/>
-          <a:ext cx="0" cy="0"/>
-          <a:chOff x="0" y="0"/>
-          <a:chExt cx="0" cy="0"/>
-        </a:xfrm>
-      </p:grpSpPr>
-      <p:sp>
-        <p:nvSpPr>
-          <p:cNvPr id="2" name="Title 1">
-            <a:extLst>
-              <a:ext uri="{FF2B5EF4-FFF2-40B4-BE49-F238E27FC236}">
-                <a16:creationId xmlns:a16="http://schemas.microsoft.com/office/drawing/2014/main" id="{89BC487E-F833-124C-6E11-CE5A778CC07A}"/>
-              </a:ext>
-            </a:extLst>
-          </p:cNvPr>
-          <p:cNvSpPr>
-            <a:spLocks noGrp="1"/>
-          </p:cNvSpPr>
-          <p:nvPr>
-            <p:ph type="title"/>
-          </p:nvPr>
-        </p:nvSpPr>
-        <p:spPr/>
-        <p:txBody>
-          <a:bodyPr/>
-          <a:lstStyle/>
-          <a:p>
-            <a:r>
-              <a:rPr lang="en-US" dirty="0"/>
-              <a:t>PerSon-2</a:t>
-            </a:r>
-            <a:br>
-              <a:rPr lang="en-US" dirty="0"/>
-            </a:br>
-            <a:r>
-              <a:rPr lang="en-US" dirty="0"/>
-              <a:t>Feedback</a:t>
-            </a:r>
-          </a:p>
-        </p:txBody>
-      </p:sp>
-      <p:sp>
-        <p:nvSpPr>
-          <p:cNvPr id="3" name="Content Placeholder 2">
-            <a:extLst>
-              <a:ext uri="{FF2B5EF4-FFF2-40B4-BE49-F238E27FC236}">
-                <a16:creationId xmlns:a16="http://schemas.microsoft.com/office/drawing/2014/main" id="{DCC67ACE-5ED9-9422-E30F-523B01D84522}"/>
-              </a:ext>
-            </a:extLst>
-          </p:cNvPr>
-          <p:cNvSpPr>
-            <a:spLocks noGrp="1"/>
-          </p:cNvSpPr>
-          <p:nvPr>
-            <p:ph idx="1"/>
-          </p:nvPr>
-        </p:nvSpPr>
-        <p:spPr/>
-        <p:txBody>
-          <a:bodyPr>
-            <a:normAutofit fontScale="92500" lnSpcReduction="10000"/>
-          </a:bodyPr>
-          <a:lstStyle/>
-          <a:p>
-            <a:pPr marL="457200" indent="-457200">
-              <a:buFont typeface="+mj-lt"/>
-              <a:buAutoNum type="arabicPeriod"/>
-            </a:pPr>
-            <a:r>
-              <a:rPr lang="en-US" dirty="0"/>
-              <a:t>Maintains a terrace gardening.</a:t>
-            </a:r>
-          </a:p>
-          <a:p>
-            <a:pPr marL="457200" indent="-457200">
-              <a:buFont typeface="+mj-lt"/>
-              <a:buAutoNum type="arabicPeriod"/>
-            </a:pPr>
-            <a:r>
-              <a:rPr lang="en-US" dirty="0"/>
-              <a:t>Depends upon the weather twice a week.</a:t>
-            </a:r>
-          </a:p>
-          <a:p>
-            <a:pPr marL="457200" indent="-457200">
-              <a:buFont typeface="+mj-lt"/>
-              <a:buAutoNum type="arabicPeriod"/>
-            </a:pPr>
-            <a:r>
-              <a:rPr lang="en-US" dirty="0"/>
-              <a:t>Usually water the plants in the late afternoon.</a:t>
-            </a:r>
-          </a:p>
-          <a:p>
-            <a:pPr marL="457200" indent="-457200">
-              <a:buFont typeface="+mj-lt"/>
-              <a:buAutoNum type="arabicPeriod"/>
-            </a:pPr>
-            <a:r>
-              <a:rPr lang="en-US" dirty="0"/>
-              <a:t>Quarter liter of water to small plants.</a:t>
-            </a:r>
-          </a:p>
-          <a:p>
-            <a:pPr marL="457200" indent="-457200">
-              <a:buFont typeface="+mj-lt"/>
-              <a:buAutoNum type="arabicPeriod"/>
-            </a:pPr>
-            <a:r>
-              <a:rPr lang="en-US" dirty="0"/>
-              <a:t>Normal process.</a:t>
-            </a:r>
-          </a:p>
-          <a:p>
-            <a:pPr marL="457200" indent="-457200">
-              <a:buFont typeface="+mj-lt"/>
-              <a:buAutoNum type="arabicPeriod"/>
-            </a:pPr>
-            <a:r>
-              <a:rPr lang="en-US" dirty="0"/>
-              <a:t>Based upon the plants appearance and soil conditions.</a:t>
-            </a:r>
-          </a:p>
-          <a:p>
-            <a:pPr marL="457200" indent="-457200">
-              <a:buFont typeface="+mj-lt"/>
-              <a:buAutoNum type="arabicPeriod"/>
-            </a:pPr>
-            <a:r>
-              <a:rPr lang="en-US" dirty="0"/>
-              <a:t>Faced challenges With </a:t>
-            </a:r>
-            <a:r>
-              <a:rPr lang="en-US" dirty="0" err="1"/>
-              <a:t>underwatering</a:t>
-            </a:r>
-            <a:r>
-              <a:rPr lang="en-US" dirty="0"/>
-              <a:t> during summer season.</a:t>
-            </a:r>
-          </a:p>
-          <a:p>
-            <a:pPr marL="0" indent="0">
-              <a:buNone/>
-            </a:pPr>
-            <a:endParaRPr lang="en-US" dirty="0"/>
-          </a:p>
-        </p:txBody>
-      </p:sp>
-    </p:spTree>
-    <p:extLst>
-      <p:ext uri="{BB962C8B-B14F-4D97-AF65-F5344CB8AC3E}">
-        <p14:creationId xmlns:p14="http://schemas.microsoft.com/office/powerpoint/2010/main" val="1821022523"/>
       </p:ext>
     </p:extLst>
   </p:cSld>
